--- a/ppt/从特斯拉到时空工程-汇报.pptx
+++ b/ppt/从特斯拉到时空工程-汇报.pptx
@@ -20,6 +20,9 @@
     <p:sldId id="268" r:id="rId20"/>
     <p:sldId id="269" r:id="rId21"/>
     <p:sldId id="270" r:id="rId22"/>
+    <p:sldId id="271" r:id="rId23"/>
+    <p:sldId id="272" r:id="rId24"/>
+    <p:sldId id="273" r:id="rId25"/>
   </p:sldIdLst>
   <p:sldSz cx="12191695" cy="6858000" type="screen4x3"/>
   <p:notesSz cx="6858000" cy="9144000"/>
@@ -656,7 +659,7 @@
           <a:lstStyle/>
           <a:p>
             <a:r>
-              <a:t>逐行读表，强调每个数字对应一个判决矩阵行。Céleri 的'装置反冲'是 2026 年新约束，说明叠加制备的极限不只是环境退相干。</a:t>
+              <a:t>这是把 T2 从分类定理升为'分类+可证伪预言'的关键一步：δα 是别人没算过的新数字。交点落在 EFT 失效区是图 7 的核心视觉信息。</a:t>
             </a:r>
           </a:p>
         </p:txBody>
@@ -726,7 +729,7 @@
           <a:lstStyle/>
           <a:p>
             <a:r>
-              <a:t>这是第 18 行'纠缠→几何'的玩具骨架。强调边界：全息对偶内部是严格的，对真实宇宙仍是 C 级假说。</a:t>
+              <a:t>统一框架的价值：三个零散实验想法（核钟进阶、GIE 升级、自旋分辨）被同一条定理覆盖。这是'从测引力到测引力的态相关性'的升级。</a:t>
             </a:r>
           </a:p>
         </p:txBody>
@@ -796,7 +799,7 @@
           <a:lstStyle/>
           <a:p>
             <a:r>
-              <a:t>每一条都有判决对象和时间尺度——这就是'路线图'与'愿望清单'的区别。重点提 QGEM 首轮与核钟，它们是最可能改变矩阵的两条。</a:t>
+              <a:t>这是判决矩阵的阳性分支：矩阵管'哪个箭头成立'，协议管'成立之后指向哪里'。合成数据逼出的近距扩展是硬结论。</a:t>
             </a:r>
           </a:p>
         </p:txBody>
@@ -866,7 +869,7 @@
           <a:lstStyle/>
           <a:p>
             <a:r>
-              <a:t>收束：三层命题是全文的压缩。最后一句点出'地图是交付物'——本论文不预言新现象，它把模糊野心变成可检验命题。</a:t>
+              <a:t>逐行读表，强调每个数字对应一个判决矩阵行。Céleri 的'装置反冲'是 2026 年新约束，说明叠加制备的极限不只是环境退相干。</a:t>
             </a:r>
           </a:p>
         </p:txBody>
@@ -892,6 +895,216 @@
 </file>
 
 <file path=ppt/notesSlides/notesSlide15.xml><?xml version="1.0" encoding="utf-8"?>
+<p:notes xmlns:a="http://schemas.openxmlformats.org/drawingml/2006/main" xmlns:p="http://schemas.openxmlformats.org/presentationml/2006/main" xmlns:r="http://schemas.openxmlformats.org/officeDocument/2006/relationships">
+  <p:cSld>
+    <p:spTree>
+      <p:nvGrpSpPr>
+        <p:cNvPr id="1" name=""/>
+        <p:cNvGrpSpPr/>
+        <p:nvPr/>
+      </p:nvGrpSpPr>
+      <p:grpSpPr>
+        <a:xfrm>
+          <a:off x="0" y="0"/>
+          <a:ext cx="0" cy="0"/>
+          <a:chOff x="0" y="0"/>
+          <a:chExt cx="0" cy="0"/>
+        </a:xfrm>
+      </p:grpSpPr>
+      <p:sp>
+        <p:nvSpPr>
+          <p:cNvPr id="2" name="Slide Image Placeholder 1"/>
+          <p:cNvSpPr>
+            <a:spLocks noGrp="1"/>
+          </p:cNvSpPr>
+          <p:nvPr>
+            <p:ph type="sldImg" idx="2"/>
+          </p:nvPr>
+        </p:nvSpPr>
+        <p:spPr/>
+      </p:sp>
+      <p:sp>
+        <p:nvSpPr>
+          <p:cNvPr id="3" name="Notes Placeholder 2"/>
+          <p:cNvSpPr>
+            <a:spLocks noGrp="1"/>
+          </p:cNvSpPr>
+          <p:nvPr>
+            <p:ph type="body" idx="3" sz="quarter"/>
+          </p:nvPr>
+        </p:nvSpPr>
+        <p:spPr/>
+        <p:txBody>
+          <a:bodyPr/>
+          <a:lstStyle/>
+          <a:p>
+            <a:r>
+              <a:t>这是第 18 行'纠缠→几何'的玩具骨架。强调边界：全息对偶内部是严格的，对真实宇宙仍是 C 级假说。</a:t>
+            </a:r>
+          </a:p>
+        </p:txBody>
+      </p:sp>
+      <p:sp>
+        <p:nvSpPr>
+          <p:cNvPr id="4" name="Slide Number Placeholder 3"/>
+          <p:cNvSpPr>
+            <a:spLocks noGrp="1"/>
+          </p:cNvSpPr>
+          <p:nvPr>
+            <p:ph type="sldNum" idx="5" sz="quarter"/>
+          </p:nvPr>
+        </p:nvSpPr>
+        <p:spPr/>
+      </p:sp>
+    </p:spTree>
+  </p:cSld>
+  <p:clrMapOvr>
+    <a:masterClrMapping/>
+  </p:clrMapOvr>
+</p:notes>
+</file>
+
+<file path=ppt/notesSlides/notesSlide16.xml><?xml version="1.0" encoding="utf-8"?>
+<p:notes xmlns:a="http://schemas.openxmlformats.org/drawingml/2006/main" xmlns:p="http://schemas.openxmlformats.org/presentationml/2006/main" xmlns:r="http://schemas.openxmlformats.org/officeDocument/2006/relationships">
+  <p:cSld>
+    <p:spTree>
+      <p:nvGrpSpPr>
+        <p:cNvPr id="1" name=""/>
+        <p:cNvGrpSpPr/>
+        <p:nvPr/>
+      </p:nvGrpSpPr>
+      <p:grpSpPr>
+        <a:xfrm>
+          <a:off x="0" y="0"/>
+          <a:ext cx="0" cy="0"/>
+          <a:chOff x="0" y="0"/>
+          <a:chExt cx="0" cy="0"/>
+        </a:xfrm>
+      </p:grpSpPr>
+      <p:sp>
+        <p:nvSpPr>
+          <p:cNvPr id="2" name="Slide Image Placeholder 1"/>
+          <p:cNvSpPr>
+            <a:spLocks noGrp="1"/>
+          </p:cNvSpPr>
+          <p:nvPr>
+            <p:ph type="sldImg" idx="2"/>
+          </p:nvPr>
+        </p:nvSpPr>
+        <p:spPr/>
+      </p:sp>
+      <p:sp>
+        <p:nvSpPr>
+          <p:cNvPr id="3" name="Notes Placeholder 2"/>
+          <p:cNvSpPr>
+            <a:spLocks noGrp="1"/>
+          </p:cNvSpPr>
+          <p:nvPr>
+            <p:ph type="body" idx="3" sz="quarter"/>
+          </p:nvPr>
+        </p:nvSpPr>
+        <p:spPr/>
+        <p:txBody>
+          <a:bodyPr/>
+          <a:lstStyle/>
+          <a:p>
+            <a:r>
+              <a:t>每一条都有判决对象和时间尺度——这就是'路线图'与'愿望清单'的区别。重点提 QGEM 首轮与核钟，它们是最可能改变矩阵的两条。</a:t>
+            </a:r>
+          </a:p>
+        </p:txBody>
+      </p:sp>
+      <p:sp>
+        <p:nvSpPr>
+          <p:cNvPr id="4" name="Slide Number Placeholder 3"/>
+          <p:cNvSpPr>
+            <a:spLocks noGrp="1"/>
+          </p:cNvSpPr>
+          <p:nvPr>
+            <p:ph type="sldNum" idx="5" sz="quarter"/>
+          </p:nvPr>
+        </p:nvSpPr>
+        <p:spPr/>
+      </p:sp>
+    </p:spTree>
+  </p:cSld>
+  <p:clrMapOvr>
+    <a:masterClrMapping/>
+  </p:clrMapOvr>
+</p:notes>
+</file>
+
+<file path=ppt/notesSlides/notesSlide17.xml><?xml version="1.0" encoding="utf-8"?>
+<p:notes xmlns:a="http://schemas.openxmlformats.org/drawingml/2006/main" xmlns:p="http://schemas.openxmlformats.org/presentationml/2006/main" xmlns:r="http://schemas.openxmlformats.org/officeDocument/2006/relationships">
+  <p:cSld>
+    <p:spTree>
+      <p:nvGrpSpPr>
+        <p:cNvPr id="1" name=""/>
+        <p:cNvGrpSpPr/>
+        <p:nvPr/>
+      </p:nvGrpSpPr>
+      <p:grpSpPr>
+        <a:xfrm>
+          <a:off x="0" y="0"/>
+          <a:ext cx="0" cy="0"/>
+          <a:chOff x="0" y="0"/>
+          <a:chExt cx="0" cy="0"/>
+        </a:xfrm>
+      </p:grpSpPr>
+      <p:sp>
+        <p:nvSpPr>
+          <p:cNvPr id="2" name="Slide Image Placeholder 1"/>
+          <p:cNvSpPr>
+            <a:spLocks noGrp="1"/>
+          </p:cNvSpPr>
+          <p:nvPr>
+            <p:ph type="sldImg" idx="2"/>
+          </p:nvPr>
+        </p:nvSpPr>
+        <p:spPr/>
+      </p:sp>
+      <p:sp>
+        <p:nvSpPr>
+          <p:cNvPr id="3" name="Notes Placeholder 2"/>
+          <p:cNvSpPr>
+            <a:spLocks noGrp="1"/>
+          </p:cNvSpPr>
+          <p:nvPr>
+            <p:ph type="body" idx="3" sz="quarter"/>
+          </p:nvPr>
+        </p:nvSpPr>
+        <p:spPr/>
+        <p:txBody>
+          <a:bodyPr/>
+          <a:lstStyle/>
+          <a:p>
+            <a:r>
+              <a:t>收束：三层命题是全文的压缩。最后一句点出'地图是交付物'——本论文不预言新现象，它把模糊野心变成可检验命题。</a:t>
+            </a:r>
+          </a:p>
+        </p:txBody>
+      </p:sp>
+      <p:sp>
+        <p:nvSpPr>
+          <p:cNvPr id="4" name="Slide Number Placeholder 3"/>
+          <p:cNvSpPr>
+            <a:spLocks noGrp="1"/>
+          </p:cNvSpPr>
+          <p:nvPr>
+            <p:ph type="sldNum" idx="5" sz="quarter"/>
+          </p:nvPr>
+        </p:nvSpPr>
+        <p:spPr/>
+      </p:sp>
+    </p:spTree>
+  </p:cSld>
+  <p:clrMapOvr>
+    <a:masterClrMapping/>
+  </p:clrMapOvr>
+</p:notes>
+</file>
+
+<file path=ppt/notesSlides/notesSlide18.xml><?xml version="1.0" encoding="utf-8"?>
 <p:notes xmlns:a="http://schemas.openxmlformats.org/drawingml/2006/main" xmlns:p="http://schemas.openxmlformats.org/presentationml/2006/main" xmlns:r="http://schemas.openxmlformats.org/officeDocument/2006/relationships">
   <p:cSld>
     <p:spTree>
@@ -4684,7 +4897,7 @@
                 <a:latin typeface="Microsoft YaHei"/>
                 <a:ea typeface="Microsoft YaHei"/>
               </a:rPr>
-              <a:t>90 节全稿 + 19 行判决矩阵 + 16 份可复现脚本 · github.com/everest-an/Antigravity</a:t>
+              <a:t>90 节全稿 + 19 行判决矩阵 + 26 份可复现脚本 · 9 篇论文中英双版 · github.com/everest-an/Antigravity</a:t>
             </a:r>
           </a:p>
         </p:txBody>
@@ -5364,6 +5577,19 @@
               <a:t>推论 3：超材料负有效质量是色散关系工程，不改 Tμν——与引力无关。</a:t>
             </a:r>
           </a:p>
+          <a:p>
+            <a:pPr algn="l"/>
+            <a:r>
+              <a:rPr sz="1400" b="1">
+                <a:solidFill>
+                  <a:srgbClr val="27AE60"/>
+                </a:solidFill>
+                <a:latin typeface="Microsoft YaHei"/>
+                <a:ea typeface="Microsoft YaHei"/>
+              </a:rPr>
+              <a:t>推论 4（新增）：态相关耦合的 EFT 上界 δα ≈ 5.4×10⁻²²——核钟态相关搜索是零背景证伪检验（下页）。</a:t>
+            </a:r>
+          </a:p>
         </p:txBody>
       </p:sp>
       <p:sp>
@@ -5487,7 +5713,7 @@
                 <a:latin typeface="Microsoft YaHei"/>
                 <a:ea typeface="Microsoft YaHei"/>
               </a:rPr>
-              <a:t>可复现性：每个箭头都有数字</a:t>
+              <a:t>推论 4：态相关耦合的 EFT 上界</a:t>
             </a:r>
           </a:p>
         </p:txBody>
@@ -5567,6 +5793,1061 @@
                 <a:ea typeface="Microsoft YaHei"/>
               </a:rPr>
               <a:t>11</a:t>
+            </a:r>
+          </a:p>
+        </p:txBody>
+      </p:sp>
+      <p:sp>
+        <p:nvSpPr>
+          <p:cNvPr id="5" name="TextBox 4"/>
+          <p:cNvSpPr txBox="1"/>
+          <p:nvPr/>
+        </p:nvSpPr>
+        <p:spPr>
+          <a:xfrm>
+            <a:off x="502920" y="1188720"/>
+            <a:ext cx="6035040" cy="4937760"/>
+          </a:xfrm>
+          <a:prstGeom prst="rect">
+            <a:avLst/>
+          </a:prstGeom>
+          <a:noFill/>
+        </p:spPr>
+        <p:txBody>
+          <a:bodyPr wrap="square">
+            <a:spAutoFit/>
+          </a:bodyPr>
+          <a:lstStyle/>
+          <a:p>
+            <a:pPr algn="l"/>
+            <a:r>
+              <a:rPr sz="1500" b="1">
+                <a:solidFill>
+                  <a:srgbClr val="1B1B2B"/>
+                </a:solidFill>
+                <a:latin typeface="Microsoft YaHei"/>
+                <a:ea typeface="Microsoft YaHei"/>
+              </a:rPr>
+              <a:t>问题：核钟进阶阶段用微波调控核内部态，检验 Yukawa 耦合是否态相关——信号可能多大？</a:t>
+            </a:r>
+          </a:p>
+          <a:p>
+            <a:pPr algn="l"/>
+            <a:r>
+              <a:rPr sz="1400" b="0">
+                <a:solidFill>
+                  <a:srgbClr val="1B1B2B"/>
+                </a:solidFill>
+                <a:latin typeface="Microsoft YaHei"/>
+                <a:ea typeface="Microsoft YaHei"/>
+              </a:rPr>
+              <a:t>EFT 答案（dim-6 功率计数）：</a:t>
+            </a:r>
+          </a:p>
+          <a:p>
+            <a:pPr algn="l"/>
+            <a:r>
+              <a:rPr sz="1400" b="0">
+                <a:solidFill>
+                  <a:srgbClr val="2980B9"/>
+                </a:solidFill>
+                <a:latin typeface="Microsoft YaHei"/>
+                <a:ea typeface="Microsoft YaHei"/>
+              </a:rPr>
+              <a:t>δα = √α · Q · M_Pl / (Λ² λ² m_Th)</a:t>
+            </a:r>
+          </a:p>
+          <a:p>
+            <a:pPr algn="l"/>
+            <a:r>
+              <a:rPr sz="1400" b="1">
+                <a:solidFill>
+                  <a:srgbClr val="C0392B"/>
+                </a:solidFill>
+                <a:latin typeface="Microsoft YaHei"/>
+                <a:ea typeface="Microsoft YaHei"/>
+              </a:rPr>
+              <a:t>取 α=10⁻⁶、Λ=10 TeV、λ=1 m：δα ≈ 5.4×10⁻²²</a:t>
+            </a:r>
+          </a:p>
+          <a:p>
+            <a:pPr algn="l"/>
+            <a:r>
+              <a:rPr sz="1400" b="0">
+                <a:solidFill>
+                  <a:srgbClr val="1B1B2B"/>
+                </a:solidFill>
+                <a:latin typeface="Microsoft YaHei"/>
+                <a:ea typeface="Microsoft YaHei"/>
+              </a:rPr>
+              <a:t>核钟 5σ 可达性 2.9×10⁻¹¹——EFT 上界低 10.7 个数量级。</a:t>
+            </a:r>
+          </a:p>
+          <a:p>
+            <a:pPr algn="l"/>
+            <a:r>
+              <a:rPr sz="1400" b="0">
+                <a:solidFill>
+                  <a:srgbClr val="1B1B2B"/>
+                </a:solidFill>
+                <a:latin typeface="Microsoft YaHei"/>
+                <a:ea typeface="Microsoft YaHei"/>
+              </a:rPr>
+              <a:t>可观测性要求截断 Λ ≲ 43 MeV——落入 EFT 失效区（QCD 尺度以下）。</a:t>
+            </a:r>
+          </a:p>
+          <a:p>
+            <a:pPr algn="l"/>
+            <a:r>
+              <a:rPr sz="1400" b="1">
+                <a:solidFill>
+                  <a:srgbClr val="27AE60"/>
+                </a:solidFill>
+                <a:latin typeface="Microsoft YaHei"/>
+                <a:ea typeface="Microsoft YaHei"/>
+              </a:rPr>
+              <a:t>结论：态相关搜索是零背景证伪检验——任何可观测信号同时证伪 GR、标准 KK 与一切弱耦合局域 EFT。</a:t>
+            </a:r>
+          </a:p>
+        </p:txBody>
+      </p:sp>
+      <p:pic>
+        <p:nvPicPr>
+          <p:cNvPr id="6" name="Picture 5" descr="fig07_state_dependence.png"/>
+          <p:cNvPicPr>
+            <a:picLocks noChangeAspect="1"/>
+          </p:cNvPicPr>
+          <p:nvPr/>
+        </p:nvPicPr>
+        <p:blipFill>
+          <a:blip r:embed="rId2"/>
+          <a:stretch>
+            <a:fillRect/>
+          </a:stretch>
+        </p:blipFill>
+        <p:spPr>
+          <a:xfrm>
+            <a:off x="6858000" y="1234440"/>
+            <a:ext cx="4846320" cy="3736685"/>
+          </a:xfrm>
+          <a:prstGeom prst="rect">
+            <a:avLst/>
+          </a:prstGeom>
+        </p:spPr>
+      </p:pic>
+      <p:sp>
+        <p:nvSpPr>
+          <p:cNvPr id="7" name="TextBox 6"/>
+          <p:cNvSpPr txBox="1"/>
+          <p:nvPr/>
+        </p:nvSpPr>
+        <p:spPr>
+          <a:xfrm>
+            <a:off x="502920" y="6446520"/>
+            <a:ext cx="9601200" cy="320040"/>
+          </a:xfrm>
+          <a:prstGeom prst="rect">
+            <a:avLst/>
+          </a:prstGeom>
+          <a:noFill/>
+        </p:spPr>
+        <p:txBody>
+          <a:bodyPr wrap="square">
+            <a:spAutoFit/>
+          </a:bodyPr>
+          <a:lstStyle/>
+          <a:p>
+            <a:pPr algn="l"/>
+            <a:r>
+              <a:rPr sz="900" b="0">
+                <a:solidFill>
+                  <a:srgbClr val="666666"/>
+                </a:solidFill>
+                <a:latin typeface="Microsoft YaHei"/>
+                <a:ea typeface="Microsoft YaHei"/>
+              </a:rPr>
+              <a:t>图 7：态相关耦合 EFT 界（experiments/17 生成）</a:t>
+            </a:r>
+          </a:p>
+        </p:txBody>
+      </p:sp>
+      <p:sp>
+        <p:nvSpPr>
+          <p:cNvPr id="8" name="TextBox 7"/>
+          <p:cNvSpPr txBox="1"/>
+          <p:nvPr/>
+        </p:nvSpPr>
+        <p:spPr>
+          <a:xfrm>
+            <a:off x="11247120" y="6446520"/>
+            <a:ext cx="731520" cy="320040"/>
+          </a:xfrm>
+          <a:prstGeom prst="rect">
+            <a:avLst/>
+          </a:prstGeom>
+          <a:noFill/>
+        </p:spPr>
+        <p:txBody>
+          <a:bodyPr wrap="square">
+            <a:spAutoFit/>
+          </a:bodyPr>
+          <a:lstStyle/>
+          <a:p>
+            <a:pPr algn="r"/>
+            <a:r>
+              <a:rPr sz="900" b="0">
+                <a:solidFill>
+                  <a:srgbClr val="666666"/>
+                </a:solidFill>
+                <a:latin typeface="Microsoft YaHei"/>
+                <a:ea typeface="Microsoft YaHei"/>
+              </a:rPr>
+              <a:t>11</a:t>
+            </a:r>
+          </a:p>
+        </p:txBody>
+      </p:sp>
+    </p:spTree>
+  </p:cSld>
+  <p:clrMapOvr>
+    <a:masterClrMapping/>
+  </p:clrMapOvr>
+</p:sld>
+</file>
+
+<file path=ppt/slides/slide12.xml><?xml version="1.0" encoding="utf-8"?>
+<p:sld xmlns:a="http://schemas.openxmlformats.org/drawingml/2006/main" xmlns:p="http://schemas.openxmlformats.org/presentationml/2006/main" xmlns:r="http://schemas.openxmlformats.org/officeDocument/2006/relationships">
+  <p:cSld>
+    <p:spTree>
+      <p:nvGrpSpPr>
+        <p:cNvPr id="1" name=""/>
+        <p:cNvGrpSpPr/>
+        <p:nvPr/>
+      </p:nvGrpSpPr>
+      <p:grpSpPr/>
+      <p:sp>
+        <p:nvSpPr>
+          <p:cNvPr id="2" name="TextBox 1"/>
+          <p:cNvSpPr txBox="1"/>
+          <p:nvPr/>
+        </p:nvSpPr>
+        <p:spPr>
+          <a:xfrm>
+            <a:off x="502920" y="256032"/>
+            <a:ext cx="11155680" cy="640080"/>
+          </a:xfrm>
+          <a:prstGeom prst="rect">
+            <a:avLst/>
+          </a:prstGeom>
+          <a:noFill/>
+        </p:spPr>
+        <p:txBody>
+          <a:bodyPr wrap="square">
+            <a:spAutoFit/>
+          </a:bodyPr>
+          <a:lstStyle/>
+          <a:p>
+            <a:pPr algn="l"/>
+            <a:r>
+              <a:rPr sz="2500" b="1">
+                <a:solidFill>
+                  <a:srgbClr val="C0392B"/>
+                </a:solidFill>
+                <a:latin typeface="Microsoft YaHei"/>
+                <a:ea typeface="Microsoft YaHei"/>
+              </a:rPr>
+              <a:t>E5：量子态作为控制变量的统一零背景定理</a:t>
+            </a:r>
+          </a:p>
+        </p:txBody>
+      </p:sp>
+      <p:sp>
+        <p:nvSpPr>
+          <p:cNvPr id="3" name="Rectangle 2"/>
+          <p:cNvSpPr/>
+          <p:nvPr/>
+        </p:nvSpPr>
+        <p:spPr>
+          <a:xfrm>
+            <a:off x="530352" y="896112"/>
+            <a:ext cx="2194560" cy="27940"/>
+          </a:xfrm>
+          <a:prstGeom prst="rect">
+            <a:avLst/>
+          </a:prstGeom>
+          <a:solidFill>
+            <a:srgbClr val="C0392B"/>
+          </a:solidFill>
+          <a:ln>
+            <a:noFill/>
+          </a:ln>
+        </p:spPr>
+        <p:style>
+          <a:lnRef idx="1">
+            <a:schemeClr val="accent1"/>
+          </a:lnRef>
+          <a:fillRef idx="3">
+            <a:schemeClr val="accent1"/>
+          </a:fillRef>
+          <a:effectRef idx="2">
+            <a:schemeClr val="accent1"/>
+          </a:effectRef>
+          <a:fontRef idx="minor">
+            <a:schemeClr val="lt1"/>
+          </a:fontRef>
+        </p:style>
+        <p:txBody>
+          <a:bodyPr rtlCol="0" anchor="ctr"/>
+          <a:lstStyle/>
+          <a:p>
+            <a:pPr algn="ctr"/>
+          </a:p>
+        </p:txBody>
+      </p:sp>
+      <p:sp>
+        <p:nvSpPr>
+          <p:cNvPr id="4" name="TextBox 3"/>
+          <p:cNvSpPr txBox="1"/>
+          <p:nvPr/>
+        </p:nvSpPr>
+        <p:spPr>
+          <a:xfrm>
+            <a:off x="11292840" y="137160"/>
+            <a:ext cx="731520" cy="457200"/>
+          </a:xfrm>
+          <a:prstGeom prst="rect">
+            <a:avLst/>
+          </a:prstGeom>
+          <a:noFill/>
+        </p:spPr>
+        <p:txBody>
+          <a:bodyPr wrap="square">
+            <a:spAutoFit/>
+          </a:bodyPr>
+          <a:lstStyle/>
+          <a:p>
+            <a:pPr algn="r"/>
+            <a:r>
+              <a:rPr sz="1300" b="1">
+                <a:solidFill>
+                  <a:srgbClr val="666666"/>
+                </a:solidFill>
+                <a:latin typeface="Microsoft YaHei"/>
+                <a:ea typeface="Microsoft YaHei"/>
+              </a:rPr>
+              <a:t>12</a:t>
+            </a:r>
+          </a:p>
+        </p:txBody>
+      </p:sp>
+      <p:sp>
+        <p:nvSpPr>
+          <p:cNvPr id="5" name="TextBox 4"/>
+          <p:cNvSpPr txBox="1"/>
+          <p:nvPr/>
+        </p:nvSpPr>
+        <p:spPr>
+          <a:xfrm>
+            <a:off x="502920" y="1188720"/>
+            <a:ext cx="5852160" cy="4937760"/>
+          </a:xfrm>
+          <a:prstGeom prst="rect">
+            <a:avLst/>
+          </a:prstGeom>
+          <a:noFill/>
+        </p:spPr>
+        <p:txBody>
+          <a:bodyPr wrap="square">
+            <a:spAutoFit/>
+          </a:bodyPr>
+          <a:lstStyle/>
+          <a:p>
+            <a:pPr algn="l"/>
+            <a:r>
+              <a:rPr sz="1500" b="1">
+                <a:solidFill>
+                  <a:srgbClr val="1B1B2B"/>
+                </a:solidFill>
+                <a:latin typeface="Microsoft YaHei"/>
+                <a:ea typeface="Microsoft YaHei"/>
+              </a:rPr>
+              <a:t>三类态控制检验共用一条 dim-6 功率计数：</a:t>
+            </a:r>
+          </a:p>
+          <a:p>
+            <a:pPr algn="l"/>
+            <a:r>
+              <a:rPr sz="1300" b="0">
+                <a:solidFill>
+                  <a:srgbClr val="2980B9"/>
+                </a:solidFill>
+                <a:latin typeface="Microsoft YaHei"/>
+                <a:ea typeface="Microsoft YaHei"/>
+              </a:rPr>
+              <a:t>· 有质量中介：δα/α = ⟨O⟩·M_Pl/(√α·Λ²·λ²·m)</a:t>
+            </a:r>
+          </a:p>
+          <a:p>
+            <a:pPr algn="l"/>
+            <a:r>
+              <a:rPr sz="1300" b="0">
+                <a:solidFill>
+                  <a:srgbClr val="2980B9"/>
+                </a:solidFill>
+                <a:latin typeface="Microsoft YaHei"/>
+                <a:ea typeface="Microsoft YaHei"/>
+              </a:rPr>
+              <a:t>· 无质量引力子：δG/G = ⟨O⟩·M_Pl²/(Λ²·d²·M_src·m)</a:t>
+            </a:r>
+          </a:p>
+          <a:p>
+            <a:pPr algn="l"/>
+            <a:r>
+              <a:rPr sz="1400" b="0">
+                <a:solidFill>
+                  <a:srgbClr val="1B1B2B"/>
+                </a:solidFill>
+                <a:latin typeface="Microsoft YaHei"/>
+                <a:ea typeface="Microsoft YaHei"/>
+              </a:rPr>
+              <a:t>三实例的零背景间隙：</a:t>
+            </a:r>
+          </a:p>
+          <a:p>
+            <a:pPr algn="l"/>
+            <a:r>
+              <a:rPr sz="1300" b="0">
+                <a:solidFill>
+                  <a:srgbClr val="1B1B2B"/>
+                </a:solidFill>
+                <a:latin typeface="Microsoft YaHei"/>
+                <a:ea typeface="Microsoft YaHei"/>
+              </a:rPr>
+              <a:t>· 核钟态相关：10.7 个数量级（Q 区分）</a:t>
+            </a:r>
+          </a:p>
+          <a:p>
+            <a:pPr algn="l"/>
+            <a:r>
+              <a:rPr sz="1300" b="0">
+                <a:solidFill>
+                  <a:srgbClr val="1B1B2B"/>
+                </a:solidFill>
+                <a:latin typeface="Microsoft YaHei"/>
+                <a:ea typeface="Microsoft YaHei"/>
+              </a:rPr>
+              <a:t>· GIE 内态控制：13.1 个数量级（e·a_B 区分）</a:t>
+            </a:r>
+          </a:p>
+          <a:p>
+            <a:pPr algn="l"/>
+            <a:r>
+              <a:rPr sz="1300" b="0">
+                <a:solidFill>
+                  <a:srgbClr val="1B1B2B"/>
+                </a:solidFill>
+                <a:latin typeface="Microsoft YaHei"/>
+                <a:ea typeface="Microsoft YaHei"/>
+              </a:rPr>
+              <a:t>· frame dragging：28.3 个数量级（自旋区分）</a:t>
+            </a:r>
+          </a:p>
+          <a:p>
+            <a:pPr algn="l"/>
+            <a:r>
+              <a:rPr sz="1400" b="1">
+                <a:solidFill>
+                  <a:srgbClr val="C0392B"/>
+                </a:solidFill>
+                <a:latin typeface="Microsoft YaHei"/>
+                <a:ea typeface="Microsoft YaHei"/>
+              </a:rPr>
+              <a:t>推论：任何可观测态相关信号 → 强耦合/非局域/态荷三种出口之一。</a:t>
+            </a:r>
+          </a:p>
+          <a:p>
+            <a:pPr algn="l"/>
+            <a:r>
+              <a:rPr sz="1400" b="1">
+                <a:solidFill>
+                  <a:srgbClr val="27AE60"/>
+                </a:solidFill>
+                <a:latin typeface="Microsoft YaHei"/>
+                <a:ea typeface="Microsoft YaHei"/>
+              </a:rPr>
+              <a:t>判决矩阵新增'态控制列'：有内部态区分的行自动获得零背景检验。</a:t>
+            </a:r>
+          </a:p>
+        </p:txBody>
+      </p:sp>
+      <p:pic>
+        <p:nvPicPr>
+          <p:cNvPr id="6" name="Picture 5" descr="fig08_quantum_state_resource.png"/>
+          <p:cNvPicPr>
+            <a:picLocks noChangeAspect="1"/>
+          </p:cNvPicPr>
+          <p:nvPr/>
+        </p:nvPicPr>
+        <p:blipFill>
+          <a:blip r:embed="rId2"/>
+          <a:stretch>
+            <a:fillRect/>
+          </a:stretch>
+        </p:blipFill>
+        <p:spPr>
+          <a:xfrm>
+            <a:off x="6583680" y="1371600"/>
+            <a:ext cx="5120640" cy="3535082"/>
+          </a:xfrm>
+          <a:prstGeom prst="rect">
+            <a:avLst/>
+          </a:prstGeom>
+        </p:spPr>
+      </p:pic>
+      <p:sp>
+        <p:nvSpPr>
+          <p:cNvPr id="7" name="TextBox 6"/>
+          <p:cNvSpPr txBox="1"/>
+          <p:nvPr/>
+        </p:nvSpPr>
+        <p:spPr>
+          <a:xfrm>
+            <a:off x="502920" y="6446520"/>
+            <a:ext cx="9601200" cy="320040"/>
+          </a:xfrm>
+          <a:prstGeom prst="rect">
+            <a:avLst/>
+          </a:prstGeom>
+          <a:noFill/>
+        </p:spPr>
+        <p:txBody>
+          <a:bodyPr wrap="square">
+            <a:spAutoFit/>
+          </a:bodyPr>
+          <a:lstStyle/>
+          <a:p>
+            <a:pPr algn="l"/>
+            <a:r>
+              <a:rPr sz="900" b="0">
+                <a:solidFill>
+                  <a:srgbClr val="666666"/>
+                </a:solidFill>
+                <a:latin typeface="Microsoft YaHei"/>
+                <a:ea typeface="Microsoft YaHei"/>
+              </a:rPr>
+              <a:t>图 8：三检验零背景间隙（experiments/18 生成）</a:t>
+            </a:r>
+          </a:p>
+        </p:txBody>
+      </p:sp>
+      <p:sp>
+        <p:nvSpPr>
+          <p:cNvPr id="8" name="TextBox 7"/>
+          <p:cNvSpPr txBox="1"/>
+          <p:nvPr/>
+        </p:nvSpPr>
+        <p:spPr>
+          <a:xfrm>
+            <a:off x="11247120" y="6446520"/>
+            <a:ext cx="731520" cy="320040"/>
+          </a:xfrm>
+          <a:prstGeom prst="rect">
+            <a:avLst/>
+          </a:prstGeom>
+          <a:noFill/>
+        </p:spPr>
+        <p:txBody>
+          <a:bodyPr wrap="square">
+            <a:spAutoFit/>
+          </a:bodyPr>
+          <a:lstStyle/>
+          <a:p>
+            <a:pPr algn="r"/>
+            <a:r>
+              <a:rPr sz="900" b="0">
+                <a:solidFill>
+                  <a:srgbClr val="666666"/>
+                </a:solidFill>
+                <a:latin typeface="Microsoft YaHei"/>
+                <a:ea typeface="Microsoft YaHei"/>
+              </a:rPr>
+              <a:t>12</a:t>
+            </a:r>
+          </a:p>
+        </p:txBody>
+      </p:sp>
+    </p:spTree>
+  </p:cSld>
+  <p:clrMapOvr>
+    <a:masterClrMapping/>
+  </p:clrMapOvr>
+</p:sld>
+</file>
+
+<file path=ppt/slides/slide13.xml><?xml version="1.0" encoding="utf-8"?>
+<p:sld xmlns:a="http://schemas.openxmlformats.org/drawingml/2006/main" xmlns:p="http://schemas.openxmlformats.org/presentationml/2006/main" xmlns:r="http://schemas.openxmlformats.org/officeDocument/2006/relationships">
+  <p:cSld>
+    <p:spTree>
+      <p:nvGrpSpPr>
+        <p:cNvPr id="1" name=""/>
+        <p:cNvGrpSpPr/>
+        <p:nvPr/>
+      </p:nvGrpSpPr>
+      <p:grpSpPr/>
+      <p:sp>
+        <p:nvSpPr>
+          <p:cNvPr id="2" name="TextBox 1"/>
+          <p:cNvSpPr txBox="1"/>
+          <p:nvPr/>
+        </p:nvSpPr>
+        <p:spPr>
+          <a:xfrm>
+            <a:off x="502920" y="256032"/>
+            <a:ext cx="11155680" cy="640080"/>
+          </a:xfrm>
+          <a:prstGeom prst="rect">
+            <a:avLst/>
+          </a:prstGeom>
+          <a:noFill/>
+        </p:spPr>
+        <p:txBody>
+          <a:bodyPr wrap="square">
+            <a:spAutoFit/>
+          </a:bodyPr>
+          <a:lstStyle/>
+          <a:p>
+            <a:pPr algn="l"/>
+            <a:r>
+              <a:rPr sz="2500" b="1">
+                <a:solidFill>
+                  <a:srgbClr val="C0392B"/>
+                </a:solidFill>
+                <a:latin typeface="Microsoft YaHei"/>
+                <a:ea typeface="Microsoft YaHei"/>
+              </a:rPr>
+              <a:t>E6：三个出口的分流协议</a:t>
+            </a:r>
+          </a:p>
+        </p:txBody>
+      </p:sp>
+      <p:sp>
+        <p:nvSpPr>
+          <p:cNvPr id="3" name="Rectangle 2"/>
+          <p:cNvSpPr/>
+          <p:nvPr/>
+        </p:nvSpPr>
+        <p:spPr>
+          <a:xfrm>
+            <a:off x="530352" y="896112"/>
+            <a:ext cx="2194560" cy="27940"/>
+          </a:xfrm>
+          <a:prstGeom prst="rect">
+            <a:avLst/>
+          </a:prstGeom>
+          <a:solidFill>
+            <a:srgbClr val="C0392B"/>
+          </a:solidFill>
+          <a:ln>
+            <a:noFill/>
+          </a:ln>
+        </p:spPr>
+        <p:style>
+          <a:lnRef idx="1">
+            <a:schemeClr val="accent1"/>
+          </a:lnRef>
+          <a:fillRef idx="3">
+            <a:schemeClr val="accent1"/>
+          </a:fillRef>
+          <a:effectRef idx="2">
+            <a:schemeClr val="accent1"/>
+          </a:effectRef>
+          <a:fontRef idx="minor">
+            <a:schemeClr val="lt1"/>
+          </a:fontRef>
+        </p:style>
+        <p:txBody>
+          <a:bodyPr rtlCol="0" anchor="ctr"/>
+          <a:lstStyle/>
+          <a:p>
+            <a:pPr algn="ctr"/>
+          </a:p>
+        </p:txBody>
+      </p:sp>
+      <p:sp>
+        <p:nvSpPr>
+          <p:cNvPr id="4" name="TextBox 3"/>
+          <p:cNvSpPr txBox="1"/>
+          <p:nvPr/>
+        </p:nvSpPr>
+        <p:spPr>
+          <a:xfrm>
+            <a:off x="11292840" y="137160"/>
+            <a:ext cx="731520" cy="457200"/>
+          </a:xfrm>
+          <a:prstGeom prst="rect">
+            <a:avLst/>
+          </a:prstGeom>
+          <a:noFill/>
+        </p:spPr>
+        <p:txBody>
+          <a:bodyPr wrap="square">
+            <a:spAutoFit/>
+          </a:bodyPr>
+          <a:lstStyle/>
+          <a:p>
+            <a:pPr algn="r"/>
+            <a:r>
+              <a:rPr sz="1300" b="1">
+                <a:solidFill>
+                  <a:srgbClr val="666666"/>
+                </a:solidFill>
+                <a:latin typeface="Microsoft YaHei"/>
+                <a:ea typeface="Microsoft YaHei"/>
+              </a:rPr>
+              <a:t>13</a:t>
+            </a:r>
+          </a:p>
+        </p:txBody>
+      </p:sp>
+      <p:sp>
+        <p:nvSpPr>
+          <p:cNvPr id="5" name="TextBox 4"/>
+          <p:cNvSpPr txBox="1"/>
+          <p:nvPr/>
+        </p:nvSpPr>
+        <p:spPr>
+          <a:xfrm>
+            <a:off x="502920" y="1188720"/>
+            <a:ext cx="6035040" cy="4937760"/>
+          </a:xfrm>
+          <a:prstGeom prst="rect">
+            <a:avLst/>
+          </a:prstGeom>
+          <a:noFill/>
+        </p:spPr>
+        <p:txBody>
+          <a:bodyPr wrap="square">
+            <a:spAutoFit/>
+          </a:bodyPr>
+          <a:lstStyle/>
+          <a:p>
+            <a:pPr algn="l"/>
+            <a:r>
+              <a:rPr sz="1500" b="1">
+                <a:solidFill>
+                  <a:srgbClr val="1B1B2B"/>
+                </a:solidFill>
+                <a:latin typeface="Microsoft YaHei"/>
+                <a:ea typeface="Microsoft YaHei"/>
+              </a:rPr>
+              <a:t>若真测到态相关信号，三步判别其归属：</a:t>
+            </a:r>
+          </a:p>
+          <a:p>
+            <a:pPr algn="l"/>
+            <a:r>
+              <a:rPr sz="1300" b="0">
+                <a:solidFill>
+                  <a:srgbClr val="1B1B2B"/>
+                </a:solidFill>
+                <a:latin typeface="Microsoft YaHei"/>
+                <a:ea typeface="Microsoft YaHei"/>
+              </a:rPr>
+              <a:t>① 形状拟合（扩展近距 0.02~0.5 m）：单 vs 双指数 → 非局域（Δχ²&gt;4）</a:t>
+            </a:r>
+          </a:p>
+          <a:p>
+            <a:pPr algn="l"/>
+            <a:r>
+              <a:rPr sz="1300" b="0">
+                <a:solidFill>
+                  <a:srgbClr val="1B1B2B"/>
+                </a:solidFill>
+                <a:latin typeface="Microsoft YaHei"/>
+                <a:ea typeface="Microsoft YaHei"/>
+              </a:rPr>
+              <a:t>② 多探针比值（8.36 eV / 76.7 eV / keV / MeV）：偏离 ~E/Λ → 强耦合（MeV 探针 2%）</a:t>
+            </a:r>
+          </a:p>
+          <a:p>
+            <a:pPr algn="l"/>
+            <a:r>
+              <a:rPr sz="1300" b="0">
+                <a:solidFill>
+                  <a:srgbClr val="1B1B2B"/>
+                </a:solidFill>
+                <a:latin typeface="Microsoft YaHei"/>
+                <a:ea typeface="Microsoft YaHei"/>
+              </a:rPr>
+              <a:t>③ m 扫描模式：线性/平方 → 态荷（模式互不重叠）</a:t>
+            </a:r>
+          </a:p>
+          <a:p>
+            <a:pPr algn="l"/>
+            <a:r>
+              <a:rPr sz="1300" b="1">
+                <a:solidFill>
+                  <a:srgbClr val="C0392B"/>
+                </a:solidFill>
+                <a:latin typeface="Microsoft YaHei"/>
+                <a:ea typeface="Microsoft YaHei"/>
+              </a:rPr>
+              <a:t>关键发现：第二尺度只在 r&lt;λ₂ 有形状信息——标准扫描对 β=0.1 混合失明，扩展扫描立即判别（β_min≈0.10）。</a:t>
+            </a:r>
+          </a:p>
+          <a:p>
+            <a:pPr algn="l"/>
+            <a:r>
+              <a:rPr sz="1400" b="1">
+                <a:solidFill>
+                  <a:srgbClr val="27AE60"/>
+                </a:solidFill>
+                <a:latin typeface="Microsoft YaHei"/>
+                <a:ea typeface="Microsoft YaHei"/>
+              </a:rPr>
+              <a:t>反向自检：三步全零 = 系统误差（协议双向安全：真信号必被归属，假信号必被暴露）。</a:t>
+            </a:r>
+          </a:p>
+          <a:p>
+            <a:pPr algn="l"/>
+            <a:r>
+              <a:rPr sz="1300" b="0">
+                <a:solidFill>
+                  <a:srgbClr val="2980B9"/>
+                </a:solidFill>
+                <a:latin typeface="Microsoft YaHei"/>
+                <a:ea typeface="Microsoft YaHei"/>
+              </a:rPr>
+              <a:t>配套硬件建议：位移台近距扫描从 0.15 m 延伸到 0.02 m。</a:t>
+            </a:r>
+          </a:p>
+        </p:txBody>
+      </p:sp>
+      <p:pic>
+        <p:nvPicPr>
+          <p:cNvPr id="6" name="Picture 5" descr="fig09_exit_triage.png"/>
+          <p:cNvPicPr>
+            <a:picLocks noChangeAspect="1"/>
+          </p:cNvPicPr>
+          <p:nvPr/>
+        </p:nvPicPr>
+        <p:blipFill>
+          <a:blip r:embed="rId2"/>
+          <a:stretch>
+            <a:fillRect/>
+          </a:stretch>
+        </p:blipFill>
+        <p:spPr>
+          <a:xfrm>
+            <a:off x="6858000" y="1097280"/>
+            <a:ext cx="4937760" cy="3778821"/>
+          </a:xfrm>
+          <a:prstGeom prst="rect">
+            <a:avLst/>
+          </a:prstGeom>
+        </p:spPr>
+      </p:pic>
+      <p:sp>
+        <p:nvSpPr>
+          <p:cNvPr id="7" name="TextBox 6"/>
+          <p:cNvSpPr txBox="1"/>
+          <p:nvPr/>
+        </p:nvSpPr>
+        <p:spPr>
+          <a:xfrm>
+            <a:off x="502920" y="6446520"/>
+            <a:ext cx="9601200" cy="320040"/>
+          </a:xfrm>
+          <a:prstGeom prst="rect">
+            <a:avLst/>
+          </a:prstGeom>
+          <a:noFill/>
+        </p:spPr>
+        <p:txBody>
+          <a:bodyPr wrap="square">
+            <a:spAutoFit/>
+          </a:bodyPr>
+          <a:lstStyle/>
+          <a:p>
+            <a:pPr algn="l"/>
+            <a:r>
+              <a:rPr sz="900" b="0">
+                <a:solidFill>
+                  <a:srgbClr val="666666"/>
+                </a:solidFill>
+                <a:latin typeface="Microsoft YaHei"/>
+                <a:ea typeface="Microsoft YaHei"/>
+              </a:rPr>
+              <a:t>图 9：三出口分流决策树（experiments/19 生成）</a:t>
+            </a:r>
+          </a:p>
+        </p:txBody>
+      </p:sp>
+      <p:sp>
+        <p:nvSpPr>
+          <p:cNvPr id="8" name="TextBox 7"/>
+          <p:cNvSpPr txBox="1"/>
+          <p:nvPr/>
+        </p:nvSpPr>
+        <p:spPr>
+          <a:xfrm>
+            <a:off x="11247120" y="6446520"/>
+            <a:ext cx="731520" cy="320040"/>
+          </a:xfrm>
+          <a:prstGeom prst="rect">
+            <a:avLst/>
+          </a:prstGeom>
+          <a:noFill/>
+        </p:spPr>
+        <p:txBody>
+          <a:bodyPr wrap="square">
+            <a:spAutoFit/>
+          </a:bodyPr>
+          <a:lstStyle/>
+          <a:p>
+            <a:pPr algn="r"/>
+            <a:r>
+              <a:rPr sz="900" b="0">
+                <a:solidFill>
+                  <a:srgbClr val="666666"/>
+                </a:solidFill>
+                <a:latin typeface="Microsoft YaHei"/>
+                <a:ea typeface="Microsoft YaHei"/>
+              </a:rPr>
+              <a:t>13</a:t>
+            </a:r>
+          </a:p>
+        </p:txBody>
+      </p:sp>
+    </p:spTree>
+  </p:cSld>
+  <p:clrMapOvr>
+    <a:masterClrMapping/>
+  </p:clrMapOvr>
+</p:sld>
+</file>
+
+<file path=ppt/slides/slide14.xml><?xml version="1.0" encoding="utf-8"?>
+<p:sld xmlns:a="http://schemas.openxmlformats.org/drawingml/2006/main" xmlns:p="http://schemas.openxmlformats.org/presentationml/2006/main" xmlns:r="http://schemas.openxmlformats.org/officeDocument/2006/relationships">
+  <p:cSld>
+    <p:spTree>
+      <p:nvGrpSpPr>
+        <p:cNvPr id="1" name=""/>
+        <p:cNvGrpSpPr/>
+        <p:nvPr/>
+      </p:nvGrpSpPr>
+      <p:grpSpPr/>
+      <p:sp>
+        <p:nvSpPr>
+          <p:cNvPr id="2" name="TextBox 1"/>
+          <p:cNvSpPr txBox="1"/>
+          <p:nvPr/>
+        </p:nvSpPr>
+        <p:spPr>
+          <a:xfrm>
+            <a:off x="502920" y="256032"/>
+            <a:ext cx="11155680" cy="640080"/>
+          </a:xfrm>
+          <a:prstGeom prst="rect">
+            <a:avLst/>
+          </a:prstGeom>
+          <a:noFill/>
+        </p:spPr>
+        <p:txBody>
+          <a:bodyPr wrap="square">
+            <a:spAutoFit/>
+          </a:bodyPr>
+          <a:lstStyle/>
+          <a:p>
+            <a:pPr algn="l"/>
+            <a:r>
+              <a:rPr sz="2500" b="1">
+                <a:solidFill>
+                  <a:srgbClr val="C0392B"/>
+                </a:solidFill>
+                <a:latin typeface="Microsoft YaHei"/>
+                <a:ea typeface="Microsoft YaHei"/>
+              </a:rPr>
+              <a:t>可复现性：每个箭头都有数字</a:t>
+            </a:r>
+          </a:p>
+        </p:txBody>
+      </p:sp>
+      <p:sp>
+        <p:nvSpPr>
+          <p:cNvPr id="3" name="Rectangle 2"/>
+          <p:cNvSpPr/>
+          <p:nvPr/>
+        </p:nvSpPr>
+        <p:spPr>
+          <a:xfrm>
+            <a:off x="530352" y="896112"/>
+            <a:ext cx="2194560" cy="27940"/>
+          </a:xfrm>
+          <a:prstGeom prst="rect">
+            <a:avLst/>
+          </a:prstGeom>
+          <a:solidFill>
+            <a:srgbClr val="C0392B"/>
+          </a:solidFill>
+          <a:ln>
+            <a:noFill/>
+          </a:ln>
+        </p:spPr>
+        <p:style>
+          <a:lnRef idx="1">
+            <a:schemeClr val="accent1"/>
+          </a:lnRef>
+          <a:fillRef idx="3">
+            <a:schemeClr val="accent1"/>
+          </a:fillRef>
+          <a:effectRef idx="2">
+            <a:schemeClr val="accent1"/>
+          </a:effectRef>
+          <a:fontRef idx="minor">
+            <a:schemeClr val="lt1"/>
+          </a:fontRef>
+        </p:style>
+        <p:txBody>
+          <a:bodyPr rtlCol="0" anchor="ctr"/>
+          <a:lstStyle/>
+          <a:p>
+            <a:pPr algn="ctr"/>
+          </a:p>
+        </p:txBody>
+      </p:sp>
+      <p:sp>
+        <p:nvSpPr>
+          <p:cNvPr id="4" name="TextBox 3"/>
+          <p:cNvSpPr txBox="1"/>
+          <p:nvPr/>
+        </p:nvSpPr>
+        <p:spPr>
+          <a:xfrm>
+            <a:off x="11292840" y="137160"/>
+            <a:ext cx="731520" cy="457200"/>
+          </a:xfrm>
+          <a:prstGeom prst="rect">
+            <a:avLst/>
+          </a:prstGeom>
+          <a:noFill/>
+        </p:spPr>
+        <p:txBody>
+          <a:bodyPr wrap="square">
+            <a:spAutoFit/>
+          </a:bodyPr>
+          <a:lstStyle/>
+          <a:p>
+            <a:pPr algn="r"/>
+            <a:r>
+              <a:rPr sz="1300" b="1">
+                <a:solidFill>
+                  <a:srgbClr val="666666"/>
+                </a:solidFill>
+                <a:latin typeface="Microsoft YaHei"/>
+                <a:ea typeface="Microsoft YaHei"/>
+              </a:rPr>
+              <a:t>14</a:t>
             </a:r>
           </a:p>
         </p:txBody>
@@ -6019,7 +7300,7 @@
                 <a:latin typeface="Microsoft YaHei"/>
                 <a:ea typeface="Microsoft YaHei"/>
               </a:rPr>
-              <a:t>16 份脚本（9 核算 + 7 模拟）全部通过；两张关键图（判决矩阵、第五力全景）直接由脚本生成。</a:t>
+              <a:t>26 份脚本（19 核算 + 7 模拟）全部通过；四张关键图（判决矩阵、第五力全景、态相关 EFT 界、零背景间隙）直接由脚本生成。</a:t>
             </a:r>
           </a:p>
           <a:p>
@@ -6076,1443 +7357,6 @@
       <p:sp>
         <p:nvSpPr>
           <p:cNvPr id="8" name="TextBox 7"/>
-          <p:cNvSpPr txBox="1"/>
-          <p:nvPr/>
-        </p:nvSpPr>
-        <p:spPr>
-          <a:xfrm>
-            <a:off x="11247120" y="6446520"/>
-            <a:ext cx="731520" cy="320040"/>
-          </a:xfrm>
-          <a:prstGeom prst="rect">
-            <a:avLst/>
-          </a:prstGeom>
-          <a:noFill/>
-        </p:spPr>
-        <p:txBody>
-          <a:bodyPr wrap="square">
-            <a:spAutoFit/>
-          </a:bodyPr>
-          <a:lstStyle/>
-          <a:p>
-            <a:pPr algn="r"/>
-            <a:r>
-              <a:rPr sz="900" b="0">
-                <a:solidFill>
-                  <a:srgbClr val="666666"/>
-                </a:solidFill>
-                <a:latin typeface="Microsoft YaHei"/>
-                <a:ea typeface="Microsoft YaHei"/>
-              </a:rPr>
-              <a:t>11</a:t>
-            </a:r>
-          </a:p>
-        </p:txBody>
-      </p:sp>
-    </p:spTree>
-  </p:cSld>
-  <p:clrMapOvr>
-    <a:masterClrMapping/>
-  </p:clrMapOvr>
-</p:sld>
-</file>
-
-<file path=ppt/slides/slide12.xml><?xml version="1.0" encoding="utf-8"?>
-<p:sld xmlns:a="http://schemas.openxmlformats.org/drawingml/2006/main" xmlns:p="http://schemas.openxmlformats.org/presentationml/2006/main" xmlns:r="http://schemas.openxmlformats.org/officeDocument/2006/relationships">
-  <p:cSld>
-    <p:spTree>
-      <p:nvGrpSpPr>
-        <p:cNvPr id="1" name=""/>
-        <p:cNvGrpSpPr/>
-        <p:nvPr/>
-      </p:nvGrpSpPr>
-      <p:grpSpPr/>
-      <p:sp>
-        <p:nvSpPr>
-          <p:cNvPr id="2" name="TextBox 1"/>
-          <p:cNvSpPr txBox="1"/>
-          <p:nvPr/>
-        </p:nvSpPr>
-        <p:spPr>
-          <a:xfrm>
-            <a:off x="502920" y="256032"/>
-            <a:ext cx="11155680" cy="640080"/>
-          </a:xfrm>
-          <a:prstGeom prst="rect">
-            <a:avLst/>
-          </a:prstGeom>
-          <a:noFill/>
-        </p:spPr>
-        <p:txBody>
-          <a:bodyPr wrap="square">
-            <a:spAutoFit/>
-          </a:bodyPr>
-          <a:lstStyle/>
-          <a:p>
-            <a:pPr algn="l"/>
-            <a:r>
-              <a:rPr sz="2500" b="1">
-                <a:solidFill>
-                  <a:srgbClr val="C0392B"/>
-                </a:solidFill>
-                <a:latin typeface="Microsoft YaHei"/>
-                <a:ea typeface="Microsoft YaHei"/>
-              </a:rPr>
-              <a:t>纠缠 → 几何：RT 极小面的玩具实现</a:t>
-            </a:r>
-          </a:p>
-        </p:txBody>
-      </p:sp>
-      <p:sp>
-        <p:nvSpPr>
-          <p:cNvPr id="3" name="Rectangle 2"/>
-          <p:cNvSpPr/>
-          <p:nvPr/>
-        </p:nvSpPr>
-        <p:spPr>
-          <a:xfrm>
-            <a:off x="530352" y="896112"/>
-            <a:ext cx="2194560" cy="27940"/>
-          </a:xfrm>
-          <a:prstGeom prst="rect">
-            <a:avLst/>
-          </a:prstGeom>
-          <a:solidFill>
-            <a:srgbClr val="C0392B"/>
-          </a:solidFill>
-          <a:ln>
-            <a:noFill/>
-          </a:ln>
-        </p:spPr>
-        <p:style>
-          <a:lnRef idx="1">
-            <a:schemeClr val="accent1"/>
-          </a:lnRef>
-          <a:fillRef idx="3">
-            <a:schemeClr val="accent1"/>
-          </a:fillRef>
-          <a:effectRef idx="2">
-            <a:schemeClr val="accent1"/>
-          </a:effectRef>
-          <a:fontRef idx="minor">
-            <a:schemeClr val="lt1"/>
-          </a:fontRef>
-        </p:style>
-        <p:txBody>
-          <a:bodyPr rtlCol="0" anchor="ctr"/>
-          <a:lstStyle/>
-          <a:p>
-            <a:pPr algn="ctr"/>
-          </a:p>
-        </p:txBody>
-      </p:sp>
-      <p:sp>
-        <p:nvSpPr>
-          <p:cNvPr id="4" name="TextBox 3"/>
-          <p:cNvSpPr txBox="1"/>
-          <p:nvPr/>
-        </p:nvSpPr>
-        <p:spPr>
-          <a:xfrm>
-            <a:off x="11292840" y="137160"/>
-            <a:ext cx="731520" cy="457200"/>
-          </a:xfrm>
-          <a:prstGeom prst="rect">
-            <a:avLst/>
-          </a:prstGeom>
-          <a:noFill/>
-        </p:spPr>
-        <p:txBody>
-          <a:bodyPr wrap="square">
-            <a:spAutoFit/>
-          </a:bodyPr>
-          <a:lstStyle/>
-          <a:p>
-            <a:pPr algn="r"/>
-            <a:r>
-              <a:rPr sz="1300" b="1">
-                <a:solidFill>
-                  <a:srgbClr val="666666"/>
-                </a:solidFill>
-                <a:latin typeface="Microsoft YaHei"/>
-                <a:ea typeface="Microsoft YaHei"/>
-              </a:rPr>
-              <a:t>12</a:t>
-            </a:r>
-          </a:p>
-        </p:txBody>
-      </p:sp>
-      <p:pic>
-        <p:nvPicPr>
-          <p:cNvPr id="5" name="Picture 4" descr="fig03_rt_mincut.png"/>
-          <p:cNvPicPr>
-            <a:picLocks noChangeAspect="1"/>
-          </p:cNvPicPr>
-          <p:nvPr/>
-        </p:nvPicPr>
-        <p:blipFill>
-          <a:blip r:embed="rId2"/>
-          <a:stretch>
-            <a:fillRect/>
-          </a:stretch>
-        </p:blipFill>
-        <p:spPr>
-          <a:xfrm>
-            <a:off x="1463040" y="1188720"/>
-            <a:ext cx="6583680" cy="5360164"/>
-          </a:xfrm>
-          <a:prstGeom prst="rect">
-            <a:avLst/>
-          </a:prstGeom>
-        </p:spPr>
-      </p:pic>
-      <p:sp>
-        <p:nvSpPr>
-          <p:cNvPr id="6" name="TextBox 5"/>
-          <p:cNvSpPr txBox="1"/>
-          <p:nvPr/>
-        </p:nvSpPr>
-        <p:spPr>
-          <a:xfrm>
-            <a:off x="8321040" y="1371600"/>
-            <a:ext cx="3383280" cy="4206240"/>
-          </a:xfrm>
-          <a:prstGeom prst="rect">
-            <a:avLst/>
-          </a:prstGeom>
-          <a:noFill/>
-        </p:spPr>
-        <p:txBody>
-          <a:bodyPr wrap="square">
-            <a:spAutoFit/>
-          </a:bodyPr>
-          <a:lstStyle/>
-          <a:p>
-            <a:pPr algn="l"/>
-            <a:r>
-              <a:rPr sz="1400" b="1">
-                <a:solidFill>
-                  <a:srgbClr val="1B1B2B"/>
-                </a:solidFill>
-                <a:latin typeface="Microsoft YaHei"/>
-                <a:ea typeface="Microsoft YaHei"/>
-              </a:rPr>
-              <a:t>等距树张量网络中：</a:t>
-            </a:r>
-          </a:p>
-          <a:p>
-            <a:pPr algn="l"/>
-            <a:r>
-              <a:rPr sz="1400" b="0">
-                <a:solidFill>
-                  <a:srgbClr val="2980B9"/>
-                </a:solidFill>
-                <a:latin typeface="Microsoft YaHei"/>
-                <a:ea typeface="Microsoft YaHei"/>
-              </a:rPr>
-              <a:t>S₂(A) ≈ mincut(A)·lnχ</a:t>
-            </a:r>
-          </a:p>
-          <a:p>
-            <a:pPr algn="l"/>
-            <a:r>
-              <a:rPr sz="1200" b="0">
-                <a:solidFill>
-                  <a:srgbClr val="1B1B2B"/>
-                </a:solidFill>
-                <a:latin typeface="Microsoft YaHei"/>
-                <a:ea typeface="Microsoft YaHei"/>
-              </a:rPr>
-              <a:t>· 半树与相邻两叶同属 mincut=1 类——熵由极小面决定，而非 |A|</a:t>
-            </a:r>
-          </a:p>
-          <a:p>
-            <a:pPr algn="l"/>
-            <a:r>
-              <a:rPr sz="1200" b="0">
-                <a:solidFill>
-                  <a:srgbClr val="1B1B2B"/>
-                </a:solidFill>
-                <a:latin typeface="Microsoft YaHei"/>
-                <a:ea typeface="Microsoft YaHei"/>
-              </a:rPr>
-              <a:t>· 远离两叶给出 ~2 倍熵——'断开的极小面'（玩具层的相变骨架）</a:t>
-            </a:r>
-          </a:p>
-          <a:p>
-            <a:pPr algn="l"/>
-            <a:r>
-              <a:rPr sz="1200" b="0">
-                <a:solidFill>
-                  <a:srgbClr val="1B1B2B"/>
-                </a:solidFill>
-                <a:latin typeface="Microsoft YaHei"/>
-                <a:ea typeface="Microsoft YaHei"/>
-              </a:rPr>
-              <a:t>· 手写树与 quimb 原生两种独立实现互验</a:t>
-            </a:r>
-          </a:p>
-          <a:p>
-            <a:pPr algn="l"/>
-            <a:r>
-              <a:rPr sz="1200" b="0">
-                <a:solidFill>
-                  <a:srgbClr val="1B1B2B"/>
-                </a:solidFill>
-                <a:latin typeface="Microsoft YaHei"/>
-                <a:ea typeface="Microsoft YaHei"/>
-              </a:rPr>
-              <a:t>· O(1/χ²) 有限键修正 = 大 N 极限的玩具对应</a:t>
-            </a:r>
-          </a:p>
-          <a:p>
-            <a:pPr algn="l"/>
-            <a:r>
-              <a:rPr sz="1200" b="1">
-                <a:solidFill>
-                  <a:srgbClr val="C0392B"/>
-                </a:solidFill>
-                <a:latin typeface="Microsoft YaHei"/>
-                <a:ea typeface="Microsoft YaHei"/>
-              </a:rPr>
-              <a:t>保真度声明：机制演示，不是'真实宇宙由张量网络构成'的证据（判决矩阵第 18 行，C 级）。</a:t>
-            </a:r>
-          </a:p>
-        </p:txBody>
-      </p:sp>
-      <p:sp>
-        <p:nvSpPr>
-          <p:cNvPr id="7" name="TextBox 6"/>
-          <p:cNvSpPr txBox="1"/>
-          <p:nvPr/>
-        </p:nvSpPr>
-        <p:spPr>
-          <a:xfrm>
-            <a:off x="502920" y="6446520"/>
-            <a:ext cx="9601200" cy="320040"/>
-          </a:xfrm>
-          <a:prstGeom prst="rect">
-            <a:avLst/>
-          </a:prstGeom>
-          <a:noFill/>
-        </p:spPr>
-        <p:txBody>
-          <a:bodyPr wrap="square">
-            <a:spAutoFit/>
-          </a:bodyPr>
-          <a:lstStyle/>
-          <a:p>
-            <a:pPr algn="l"/>
-            <a:r>
-              <a:rPr sz="900" b="0">
-                <a:solidFill>
-                  <a:srgbClr val="666666"/>
-                </a:solidFill>
-                <a:latin typeface="Microsoft YaHei"/>
-                <a:ea typeface="Microsoft YaHei"/>
-              </a:rPr>
-              <a:t>图 3：RT 极小面互验（模拟 05/07）</a:t>
-            </a:r>
-          </a:p>
-        </p:txBody>
-      </p:sp>
-      <p:sp>
-        <p:nvSpPr>
-          <p:cNvPr id="8" name="TextBox 7"/>
-          <p:cNvSpPr txBox="1"/>
-          <p:nvPr/>
-        </p:nvSpPr>
-        <p:spPr>
-          <a:xfrm>
-            <a:off x="11247120" y="6446520"/>
-            <a:ext cx="731520" cy="320040"/>
-          </a:xfrm>
-          <a:prstGeom prst="rect">
-            <a:avLst/>
-          </a:prstGeom>
-          <a:noFill/>
-        </p:spPr>
-        <p:txBody>
-          <a:bodyPr wrap="square">
-            <a:spAutoFit/>
-          </a:bodyPr>
-          <a:lstStyle/>
-          <a:p>
-            <a:pPr algn="r"/>
-            <a:r>
-              <a:rPr sz="900" b="0">
-                <a:solidFill>
-                  <a:srgbClr val="666666"/>
-                </a:solidFill>
-                <a:latin typeface="Microsoft YaHei"/>
-                <a:ea typeface="Microsoft YaHei"/>
-              </a:rPr>
-              <a:t>12</a:t>
-            </a:r>
-          </a:p>
-        </p:txBody>
-      </p:sp>
-    </p:spTree>
-  </p:cSld>
-  <p:clrMapOvr>
-    <a:masterClrMapping/>
-  </p:clrMapOvr>
-</p:sld>
-</file>
-
-<file path=ppt/slides/slide13.xml><?xml version="1.0" encoding="utf-8"?>
-<p:sld xmlns:a="http://schemas.openxmlformats.org/drawingml/2006/main" xmlns:p="http://schemas.openxmlformats.org/presentationml/2006/main" xmlns:r="http://schemas.openxmlformats.org/officeDocument/2006/relationships">
-  <p:cSld>
-    <p:spTree>
-      <p:nvGrpSpPr>
-        <p:cNvPr id="1" name=""/>
-        <p:cNvGrpSpPr/>
-        <p:nvPr/>
-      </p:nvGrpSpPr>
-      <p:grpSpPr/>
-      <p:sp>
-        <p:nvSpPr>
-          <p:cNvPr id="2" name="TextBox 1"/>
-          <p:cNvSpPr txBox="1"/>
-          <p:nvPr/>
-        </p:nvSpPr>
-        <p:spPr>
-          <a:xfrm>
-            <a:off x="502920" y="256032"/>
-            <a:ext cx="11155680" cy="640080"/>
-          </a:xfrm>
-          <a:prstGeom prst="rect">
-            <a:avLst/>
-          </a:prstGeom>
-          <a:noFill/>
-        </p:spPr>
-        <p:txBody>
-          <a:bodyPr wrap="square">
-            <a:spAutoFit/>
-          </a:bodyPr>
-          <a:lstStyle/>
-          <a:p>
-            <a:pPr algn="l"/>
-            <a:r>
-              <a:rPr sz="2500" b="1">
-                <a:solidFill>
-                  <a:srgbClr val="C0392B"/>
-                </a:solidFill>
-                <a:latin typeface="Microsoft YaHei"/>
-                <a:ea typeface="Microsoft YaHei"/>
-              </a:rPr>
-              <a:t>未来方向：近 / 中 / 远期行动清单</a:t>
-            </a:r>
-          </a:p>
-        </p:txBody>
-      </p:sp>
-      <p:sp>
-        <p:nvSpPr>
-          <p:cNvPr id="3" name="Rectangle 2"/>
-          <p:cNvSpPr/>
-          <p:nvPr/>
-        </p:nvSpPr>
-        <p:spPr>
-          <a:xfrm>
-            <a:off x="530352" y="896112"/>
-            <a:ext cx="2194560" cy="27940"/>
-          </a:xfrm>
-          <a:prstGeom prst="rect">
-            <a:avLst/>
-          </a:prstGeom>
-          <a:solidFill>
-            <a:srgbClr val="C0392B"/>
-          </a:solidFill>
-          <a:ln>
-            <a:noFill/>
-          </a:ln>
-        </p:spPr>
-        <p:style>
-          <a:lnRef idx="1">
-            <a:schemeClr val="accent1"/>
-          </a:lnRef>
-          <a:fillRef idx="3">
-            <a:schemeClr val="accent1"/>
-          </a:fillRef>
-          <a:effectRef idx="2">
-            <a:schemeClr val="accent1"/>
-          </a:effectRef>
-          <a:fontRef idx="minor">
-            <a:schemeClr val="lt1"/>
-          </a:fontRef>
-        </p:style>
-        <p:txBody>
-          <a:bodyPr rtlCol="0" anchor="ctr"/>
-          <a:lstStyle/>
-          <a:p>
-            <a:pPr algn="ctr"/>
-          </a:p>
-        </p:txBody>
-      </p:sp>
-      <p:sp>
-        <p:nvSpPr>
-          <p:cNvPr id="4" name="TextBox 3"/>
-          <p:cNvSpPr txBox="1"/>
-          <p:nvPr/>
-        </p:nvSpPr>
-        <p:spPr>
-          <a:xfrm>
-            <a:off x="11292840" y="137160"/>
-            <a:ext cx="731520" cy="457200"/>
-          </a:xfrm>
-          <a:prstGeom prst="rect">
-            <a:avLst/>
-          </a:prstGeom>
-          <a:noFill/>
-        </p:spPr>
-        <p:txBody>
-          <a:bodyPr wrap="square">
-            <a:spAutoFit/>
-          </a:bodyPr>
-          <a:lstStyle/>
-          <a:p>
-            <a:pPr algn="r"/>
-            <a:r>
-              <a:rPr sz="1300" b="1">
-                <a:solidFill>
-                  <a:srgbClr val="666666"/>
-                </a:solidFill>
-                <a:latin typeface="Microsoft YaHei"/>
-                <a:ea typeface="Microsoft YaHei"/>
-              </a:rPr>
-              <a:t>13</a:t>
-            </a:r>
-          </a:p>
-        </p:txBody>
-      </p:sp>
-      <p:sp>
-        <p:nvSpPr>
-          <p:cNvPr id="5" name="Rectangle 4"/>
-          <p:cNvSpPr/>
-          <p:nvPr/>
-        </p:nvSpPr>
-        <p:spPr>
-          <a:xfrm>
-            <a:off x="502920" y="1188720"/>
-            <a:ext cx="3566160" cy="4663440"/>
-          </a:xfrm>
-          <a:prstGeom prst="rect">
-            <a:avLst/>
-          </a:prstGeom>
-          <a:solidFill>
-            <a:srgbClr val="F5F5F7"/>
-          </a:solidFill>
-          <a:ln w="17780">
-            <a:solidFill>
-              <a:srgbClr val="27AE60"/>
-            </a:solidFill>
-          </a:ln>
-        </p:spPr>
-        <p:style>
-          <a:lnRef idx="1">
-            <a:schemeClr val="accent1"/>
-          </a:lnRef>
-          <a:fillRef idx="3">
-            <a:schemeClr val="accent1"/>
-          </a:fillRef>
-          <a:effectRef idx="2">
-            <a:schemeClr val="accent1"/>
-          </a:effectRef>
-          <a:fontRef idx="minor">
-            <a:schemeClr val="lt1"/>
-          </a:fontRef>
-        </p:style>
-        <p:txBody>
-          <a:bodyPr rtlCol="0" anchor="ctr"/>
-          <a:lstStyle/>
-          <a:p>
-            <a:pPr algn="ctr"/>
-          </a:p>
-        </p:txBody>
-      </p:sp>
-      <p:sp>
-        <p:nvSpPr>
-          <p:cNvPr id="6" name="TextBox 5"/>
-          <p:cNvSpPr txBox="1"/>
-          <p:nvPr/>
-        </p:nvSpPr>
-        <p:spPr>
-          <a:xfrm>
-            <a:off x="612648" y="1280160"/>
-            <a:ext cx="3383280" cy="457200"/>
-          </a:xfrm>
-          <a:prstGeom prst="rect">
-            <a:avLst/>
-          </a:prstGeom>
-          <a:noFill/>
-        </p:spPr>
-        <p:txBody>
-          <a:bodyPr wrap="square">
-            <a:spAutoFit/>
-          </a:bodyPr>
-          <a:lstStyle/>
-          <a:p>
-            <a:pPr algn="l"/>
-            <a:r>
-              <a:rPr sz="1500" b="1">
-                <a:solidFill>
-                  <a:srgbClr val="27AE60"/>
-                </a:solidFill>
-                <a:latin typeface="Microsoft YaHei"/>
-                <a:ea typeface="Microsoft YaHei"/>
-              </a:rPr>
-              <a:t>近期 3–5 年</a:t>
-            </a:r>
-          </a:p>
-        </p:txBody>
-      </p:sp>
-      <p:sp>
-        <p:nvSpPr>
-          <p:cNvPr id="7" name="TextBox 6"/>
-          <p:cNvSpPr txBox="1"/>
-          <p:nvPr/>
-        </p:nvSpPr>
-        <p:spPr>
-          <a:xfrm>
-            <a:off x="612648" y="1783080"/>
-            <a:ext cx="3383280" cy="3840480"/>
-          </a:xfrm>
-          <a:prstGeom prst="rect">
-            <a:avLst/>
-          </a:prstGeom>
-          <a:noFill/>
-        </p:spPr>
-        <p:txBody>
-          <a:bodyPr wrap="square">
-            <a:spAutoFit/>
-          </a:bodyPr>
-          <a:lstStyle/>
-          <a:p>
-            <a:pPr algn="l"/>
-            <a:r>
-              <a:rPr sz="1150" b="0">
-                <a:solidFill>
-                  <a:srgbClr val="1B1B2B"/>
-                </a:solidFill>
-                <a:latin typeface="Microsoft YaHei"/>
-                <a:ea typeface="Microsoft YaHei"/>
-              </a:rPr>
-              <a:t>· GQuEST 首轮数据（第 15 行）</a:t>
-            </a:r>
-          </a:p>
-          <a:p>
-            <a:pPr algn="l"/>
-            <a:r>
-              <a:rPr sz="1150" b="0">
-                <a:solidFill>
-                  <a:srgbClr val="1B1B2B"/>
-                </a:solidFill>
-                <a:latin typeface="Microsoft YaHei"/>
-                <a:ea typeface="Microsoft YaHei"/>
-              </a:rPr>
-              <a:t>· reservoir-engineered GIE（Q 因子降一个量级）</a:t>
-            </a:r>
-          </a:p>
-          <a:p>
-            <a:pPr algn="l"/>
-            <a:r>
-              <a:rPr sz="1150" b="0">
-                <a:solidFill>
-                  <a:srgbClr val="1B1B2B"/>
-                </a:solidFill>
-                <a:latin typeface="Microsoft YaHei"/>
-                <a:ea typeface="Microsoft YaHei"/>
-              </a:rPr>
-              <a:t>· CSS WEP 系统误差账本</a:t>
-            </a:r>
-          </a:p>
-          <a:p>
-            <a:pPr algn="l"/>
-            <a:r>
-              <a:rPr sz="1150" b="0">
-                <a:solidFill>
-                  <a:srgbClr val="1B1B2B"/>
-                </a:solidFill>
-                <a:latin typeface="Microsoft YaHei"/>
-                <a:ea typeface="Microsoft YaHei"/>
-              </a:rPr>
-              <a:t>· 钍核钟 10⁻¹⁸ 稳定度</a:t>
-            </a:r>
-          </a:p>
-          <a:p>
-            <a:pPr algn="l"/>
-            <a:r>
-              <a:rPr sz="1150" b="0">
-                <a:solidFill>
-                  <a:srgbClr val="1B1B2B"/>
-                </a:solidFill>
-                <a:latin typeface="Microsoft YaHei"/>
-                <a:ea typeface="Microsoft YaHei"/>
-              </a:rPr>
-              <a:t>· Céleri 反冲约束实验验证</a:t>
-            </a:r>
-          </a:p>
-        </p:txBody>
-      </p:sp>
-      <p:sp>
-        <p:nvSpPr>
-          <p:cNvPr id="8" name="Rectangle 7"/>
-          <p:cNvSpPr/>
-          <p:nvPr/>
-        </p:nvSpPr>
-        <p:spPr>
-          <a:xfrm>
-            <a:off x="4343400" y="1188720"/>
-            <a:ext cx="3566160" cy="4663440"/>
-          </a:xfrm>
-          <a:prstGeom prst="rect">
-            <a:avLst/>
-          </a:prstGeom>
-          <a:solidFill>
-            <a:srgbClr val="F5F5F7"/>
-          </a:solidFill>
-          <a:ln w="17780">
-            <a:solidFill>
-              <a:srgbClr val="2980B9"/>
-            </a:solidFill>
-          </a:ln>
-        </p:spPr>
-        <p:style>
-          <a:lnRef idx="1">
-            <a:schemeClr val="accent1"/>
-          </a:lnRef>
-          <a:fillRef idx="3">
-            <a:schemeClr val="accent1"/>
-          </a:fillRef>
-          <a:effectRef idx="2">
-            <a:schemeClr val="accent1"/>
-          </a:effectRef>
-          <a:fontRef idx="minor">
-            <a:schemeClr val="lt1"/>
-          </a:fontRef>
-        </p:style>
-        <p:txBody>
-          <a:bodyPr rtlCol="0" anchor="ctr"/>
-          <a:lstStyle/>
-          <a:p>
-            <a:pPr algn="ctr"/>
-          </a:p>
-        </p:txBody>
-      </p:sp>
-      <p:sp>
-        <p:nvSpPr>
-          <p:cNvPr id="9" name="TextBox 8"/>
-          <p:cNvSpPr txBox="1"/>
-          <p:nvPr/>
-        </p:nvSpPr>
-        <p:spPr>
-          <a:xfrm>
-            <a:off x="4453128" y="1280160"/>
-            <a:ext cx="3383280" cy="457200"/>
-          </a:xfrm>
-          <a:prstGeom prst="rect">
-            <a:avLst/>
-          </a:prstGeom>
-          <a:noFill/>
-        </p:spPr>
-        <p:txBody>
-          <a:bodyPr wrap="square">
-            <a:spAutoFit/>
-          </a:bodyPr>
-          <a:lstStyle/>
-          <a:p>
-            <a:pPr algn="l"/>
-            <a:r>
-              <a:rPr sz="1500" b="1">
-                <a:solidFill>
-                  <a:srgbClr val="2980B9"/>
-                </a:solidFill>
-                <a:latin typeface="Microsoft YaHei"/>
-                <a:ea typeface="Microsoft YaHei"/>
-              </a:rPr>
-              <a:t>中期 5–10 年</a:t>
-            </a:r>
-          </a:p>
-        </p:txBody>
-      </p:sp>
-      <p:sp>
-        <p:nvSpPr>
-          <p:cNvPr id="10" name="TextBox 9"/>
-          <p:cNvSpPr txBox="1"/>
-          <p:nvPr/>
-        </p:nvSpPr>
-        <p:spPr>
-          <a:xfrm>
-            <a:off x="4453128" y="1783080"/>
-            <a:ext cx="3383280" cy="3840480"/>
-          </a:xfrm>
-          <a:prstGeom prst="rect">
-            <a:avLst/>
-          </a:prstGeom>
-          <a:noFill/>
-        </p:spPr>
-        <p:txBody>
-          <a:bodyPr wrap="square">
-            <a:spAutoFit/>
-          </a:bodyPr>
-          <a:lstStyle/>
-          <a:p>
-            <a:pPr algn="l"/>
-            <a:r>
-              <a:rPr sz="1150" b="0">
-                <a:solidFill>
-                  <a:srgbClr val="1B1B2B"/>
-                </a:solidFill>
-                <a:latin typeface="Microsoft YaHei"/>
-                <a:ea typeface="Microsoft YaHei"/>
-              </a:rPr>
-              <a:t>· QGEM 首轮（纳米金刚石 SGI）</a:t>
-            </a:r>
-          </a:p>
-          <a:p>
-            <a:pPr algn="l"/>
-            <a:r>
-              <a:rPr sz="1150" b="0">
-                <a:solidFill>
-                  <a:srgbClr val="1B1B2B"/>
-                </a:solidFill>
-                <a:latin typeface="Microsoft YaHei"/>
-                <a:ea typeface="Microsoft YaHei"/>
-              </a:rPr>
-              <a:t>· 引力 AB 的区分几何设计</a:t>
-            </a:r>
-          </a:p>
-          <a:p>
-            <a:pPr algn="l"/>
-            <a:r>
-              <a:rPr sz="1150" b="0">
-                <a:solidFill>
-                  <a:srgbClr val="1B1B2B"/>
-                </a:solidFill>
-                <a:latin typeface="Microsoft YaHei"/>
-                <a:ea typeface="Microsoft YaHei"/>
-              </a:rPr>
-              <a:t>· LMT 10⁻¹⁷ WEP（STE-QUEST 规格）</a:t>
-            </a:r>
-          </a:p>
-          <a:p>
-            <a:pPr algn="l"/>
-            <a:r>
-              <a:rPr sz="1150" b="0">
-                <a:solidFill>
-                  <a:srgbClr val="1B1B2B"/>
-                </a:solidFill>
-                <a:latin typeface="Microsoft YaHei"/>
-                <a:ea typeface="Microsoft YaHei"/>
-              </a:rPr>
-              <a:t>· MAQRO 级空间任务（坍缩模型判决）</a:t>
-            </a:r>
-          </a:p>
-        </p:txBody>
-      </p:sp>
-      <p:sp>
-        <p:nvSpPr>
-          <p:cNvPr id="11" name="Rectangle 10"/>
-          <p:cNvSpPr/>
-          <p:nvPr/>
-        </p:nvSpPr>
-        <p:spPr>
-          <a:xfrm>
-            <a:off x="8183880" y="1188720"/>
-            <a:ext cx="3566160" cy="4663440"/>
-          </a:xfrm>
-          <a:prstGeom prst="rect">
-            <a:avLst/>
-          </a:prstGeom>
-          <a:solidFill>
-            <a:srgbClr val="F5F5F7"/>
-          </a:solidFill>
-          <a:ln w="17780">
-            <a:solidFill>
-              <a:srgbClr val="8E44AD"/>
-            </a:solidFill>
-          </a:ln>
-        </p:spPr>
-        <p:style>
-          <a:lnRef idx="1">
-            <a:schemeClr val="accent1"/>
-          </a:lnRef>
-          <a:fillRef idx="3">
-            <a:schemeClr val="accent1"/>
-          </a:fillRef>
-          <a:effectRef idx="2">
-            <a:schemeClr val="accent1"/>
-          </a:effectRef>
-          <a:fontRef idx="minor">
-            <a:schemeClr val="lt1"/>
-          </a:fontRef>
-        </p:style>
-        <p:txBody>
-          <a:bodyPr rtlCol="0" anchor="ctr"/>
-          <a:lstStyle/>
-          <a:p>
-            <a:pPr algn="ctr"/>
-          </a:p>
-        </p:txBody>
-      </p:sp>
-      <p:sp>
-        <p:nvSpPr>
-          <p:cNvPr id="12" name="TextBox 11"/>
-          <p:cNvSpPr txBox="1"/>
-          <p:nvPr/>
-        </p:nvSpPr>
-        <p:spPr>
-          <a:xfrm>
-            <a:off x="8293608" y="1280160"/>
-            <a:ext cx="3383280" cy="457200"/>
-          </a:xfrm>
-          <a:prstGeom prst="rect">
-            <a:avLst/>
-          </a:prstGeom>
-          <a:noFill/>
-        </p:spPr>
-        <p:txBody>
-          <a:bodyPr wrap="square">
-            <a:spAutoFit/>
-          </a:bodyPr>
-          <a:lstStyle/>
-          <a:p>
-            <a:pPr algn="l"/>
-            <a:r>
-              <a:rPr sz="1500" b="1">
-                <a:solidFill>
-                  <a:srgbClr val="8E44AD"/>
-                </a:solidFill>
-                <a:latin typeface="Microsoft YaHei"/>
-                <a:ea typeface="Microsoft YaHei"/>
-              </a:rPr>
-              <a:t>远期 10 年+</a:t>
-            </a:r>
-          </a:p>
-        </p:txBody>
-      </p:sp>
-      <p:sp>
-        <p:nvSpPr>
-          <p:cNvPr id="13" name="TextBox 12"/>
-          <p:cNvSpPr txBox="1"/>
-          <p:nvPr/>
-        </p:nvSpPr>
-        <p:spPr>
-          <a:xfrm>
-            <a:off x="8293608" y="1783080"/>
-            <a:ext cx="3383280" cy="3840480"/>
-          </a:xfrm>
-          <a:prstGeom prst="rect">
-            <a:avLst/>
-          </a:prstGeom>
-          <a:noFill/>
-        </p:spPr>
-        <p:txBody>
-          <a:bodyPr wrap="square">
-            <a:spAutoFit/>
-          </a:bodyPr>
-          <a:lstStyle/>
-          <a:p>
-            <a:pPr algn="l"/>
-            <a:r>
-              <a:rPr sz="1150" b="0">
-                <a:solidFill>
-                  <a:srgbClr val="1B1B2B"/>
-                </a:solidFill>
-                <a:latin typeface="Microsoft YaHei"/>
-                <a:ea typeface="Microsoft YaHei"/>
-              </a:rPr>
-              <a:t>· frame-dragging GIE（缺口 ~7 量级）</a:t>
-            </a:r>
-          </a:p>
-          <a:p>
-            <a:pPr algn="l"/>
-            <a:r>
-              <a:rPr sz="1150" b="0">
-                <a:solidFill>
-                  <a:srgbClr val="1B1B2B"/>
-                </a:solidFill>
-                <a:latin typeface="Microsoft YaHei"/>
-                <a:ea typeface="Microsoft YaHei"/>
-              </a:rPr>
-              <a:t>· bolometric 引力子噪声</a:t>
-            </a:r>
-          </a:p>
-          <a:p>
-            <a:pPr algn="l"/>
-            <a:r>
-              <a:rPr sz="1150" b="0">
-                <a:solidFill>
-                  <a:srgbClr val="1B1B2B"/>
-                </a:solidFill>
-                <a:latin typeface="Microsoft YaHei"/>
-                <a:ea typeface="Microsoft YaHei"/>
-              </a:rPr>
-              <a:t>· 量子因果结构（Hardy QEP）</a:t>
-            </a:r>
-          </a:p>
-        </p:txBody>
-      </p:sp>
-      <p:sp>
-        <p:nvSpPr>
-          <p:cNvPr id="14" name="TextBox 13"/>
-          <p:cNvSpPr txBox="1"/>
-          <p:nvPr/>
-        </p:nvSpPr>
-        <p:spPr>
-          <a:xfrm>
-            <a:off x="502920" y="6446520"/>
-            <a:ext cx="9601200" cy="320040"/>
-          </a:xfrm>
-          <a:prstGeom prst="rect">
-            <a:avLst/>
-          </a:prstGeom>
-          <a:noFill/>
-        </p:spPr>
-        <p:txBody>
-          <a:bodyPr wrap="square">
-            <a:spAutoFit/>
-          </a:bodyPr>
-          <a:lstStyle/>
-          <a:p>
-            <a:pPr algn="l"/>
-            <a:r>
-              <a:rPr sz="900" b="0">
-                <a:solidFill>
-                  <a:srgbClr val="666666"/>
-                </a:solidFill>
-                <a:latin typeface="Microsoft YaHei"/>
-                <a:ea typeface="Microsoft YaHei"/>
-              </a:rPr>
-              <a:t>来源：物理现实的工程学边界.md 第八十八节（12 条行动清单）</a:t>
-            </a:r>
-          </a:p>
-        </p:txBody>
-      </p:sp>
-      <p:sp>
-        <p:nvSpPr>
-          <p:cNvPr id="15" name="TextBox 14"/>
-          <p:cNvSpPr txBox="1"/>
-          <p:nvPr/>
-        </p:nvSpPr>
-        <p:spPr>
-          <a:xfrm>
-            <a:off x="11247120" y="6446520"/>
-            <a:ext cx="731520" cy="320040"/>
-          </a:xfrm>
-          <a:prstGeom prst="rect">
-            <a:avLst/>
-          </a:prstGeom>
-          <a:noFill/>
-        </p:spPr>
-        <p:txBody>
-          <a:bodyPr wrap="square">
-            <a:spAutoFit/>
-          </a:bodyPr>
-          <a:lstStyle/>
-          <a:p>
-            <a:pPr algn="r"/>
-            <a:r>
-              <a:rPr sz="900" b="0">
-                <a:solidFill>
-                  <a:srgbClr val="666666"/>
-                </a:solidFill>
-                <a:latin typeface="Microsoft YaHei"/>
-                <a:ea typeface="Microsoft YaHei"/>
-              </a:rPr>
-              <a:t>13</a:t>
-            </a:r>
-          </a:p>
-        </p:txBody>
-      </p:sp>
-    </p:spTree>
-  </p:cSld>
-  <p:clrMapOvr>
-    <a:masterClrMapping/>
-  </p:clrMapOvr>
-</p:sld>
-</file>
-
-<file path=ppt/slides/slide14.xml><?xml version="1.0" encoding="utf-8"?>
-<p:sld xmlns:a="http://schemas.openxmlformats.org/drawingml/2006/main" xmlns:p="http://schemas.openxmlformats.org/presentationml/2006/main" xmlns:r="http://schemas.openxmlformats.org/officeDocument/2006/relationships">
-  <p:cSld>
-    <p:spTree>
-      <p:nvGrpSpPr>
-        <p:cNvPr id="1" name=""/>
-        <p:cNvGrpSpPr/>
-        <p:nvPr/>
-      </p:nvGrpSpPr>
-      <p:grpSpPr/>
-      <p:sp>
-        <p:nvSpPr>
-          <p:cNvPr id="2" name="Rectangle 1"/>
-          <p:cNvSpPr/>
-          <p:nvPr/>
-        </p:nvSpPr>
-        <p:spPr>
-          <a:xfrm>
-            <a:off x="0" y="0"/>
-            <a:ext cx="12191695" cy="6858000"/>
-          </a:xfrm>
-          <a:prstGeom prst="rect">
-            <a:avLst/>
-          </a:prstGeom>
-          <a:solidFill>
-            <a:srgbClr val="1B1B2B"/>
-          </a:solidFill>
-          <a:ln>
-            <a:noFill/>
-          </a:ln>
-        </p:spPr>
-        <p:style>
-          <a:lnRef idx="1">
-            <a:schemeClr val="accent1"/>
-          </a:lnRef>
-          <a:fillRef idx="3">
-            <a:schemeClr val="accent1"/>
-          </a:fillRef>
-          <a:effectRef idx="2">
-            <a:schemeClr val="accent1"/>
-          </a:effectRef>
-          <a:fontRef idx="minor">
-            <a:schemeClr val="lt1"/>
-          </a:fontRef>
-        </p:style>
-        <p:txBody>
-          <a:bodyPr rtlCol="0" anchor="ctr"/>
-          <a:lstStyle/>
-          <a:p>
-            <a:pPr algn="ctr"/>
-          </a:p>
-        </p:txBody>
-      </p:sp>
-      <p:sp>
-        <p:nvSpPr>
-          <p:cNvPr id="3" name="TextBox 2"/>
-          <p:cNvSpPr txBox="1"/>
-          <p:nvPr/>
-        </p:nvSpPr>
-        <p:spPr>
-          <a:xfrm>
-            <a:off x="1097280" y="1005840"/>
-            <a:ext cx="10058400" cy="640080"/>
-          </a:xfrm>
-          <a:prstGeom prst="rect">
-            <a:avLst/>
-          </a:prstGeom>
-          <a:noFill/>
-        </p:spPr>
-        <p:txBody>
-          <a:bodyPr wrap="square">
-            <a:spAutoFit/>
-          </a:bodyPr>
-          <a:lstStyle/>
-          <a:p>
-            <a:pPr algn="ctr"/>
-            <a:r>
-              <a:rPr sz="2800" b="1">
-                <a:solidFill>
-                  <a:srgbClr val="FFFFFF"/>
-                </a:solidFill>
-                <a:latin typeface="Microsoft YaHei"/>
-                <a:ea typeface="Microsoft YaHei"/>
-              </a:rPr>
-              <a:t>总结：核心命题三层</a:t>
-            </a:r>
-          </a:p>
-        </p:txBody>
-      </p:sp>
-      <p:sp>
-        <p:nvSpPr>
-          <p:cNvPr id="4" name="TextBox 3"/>
-          <p:cNvSpPr txBox="1"/>
-          <p:nvPr/>
-        </p:nvSpPr>
-        <p:spPr>
-          <a:xfrm>
-            <a:off x="1371600" y="1783080"/>
-            <a:ext cx="1463040" cy="548640"/>
-          </a:xfrm>
-          <a:prstGeom prst="rect">
-            <a:avLst/>
-          </a:prstGeom>
-          <a:noFill/>
-        </p:spPr>
-        <p:txBody>
-          <a:bodyPr wrap="square">
-            <a:spAutoFit/>
-          </a:bodyPr>
-          <a:lstStyle/>
-          <a:p>
-            <a:pPr algn="l"/>
-            <a:r>
-              <a:rPr sz="1700" b="1">
-                <a:solidFill>
-                  <a:srgbClr val="C0392B"/>
-                </a:solidFill>
-                <a:latin typeface="Microsoft YaHei"/>
-                <a:ea typeface="Microsoft YaHei"/>
-              </a:rPr>
-              <a:t>历史层</a:t>
-            </a:r>
-          </a:p>
-        </p:txBody>
-      </p:sp>
-      <p:sp>
-        <p:nvSpPr>
-          <p:cNvPr id="5" name="TextBox 4"/>
-          <p:cNvSpPr txBox="1"/>
-          <p:nvPr/>
-        </p:nvSpPr>
-        <p:spPr>
-          <a:xfrm>
-            <a:off x="2926080" y="1783080"/>
-            <a:ext cx="7955279" cy="1097280"/>
-          </a:xfrm>
-          <a:prstGeom prst="rect">
-            <a:avLst/>
-          </a:prstGeom>
-          <a:noFill/>
-        </p:spPr>
-        <p:txBody>
-          <a:bodyPr wrap="square">
-            <a:spAutoFit/>
-          </a:bodyPr>
-          <a:lstStyle/>
-          <a:p>
-            <a:pPr algn="l"/>
-            <a:r>
-              <a:rPr sz="1400" b="0">
-                <a:solidFill>
-                  <a:srgbClr val="FFFFFF"/>
-                </a:solidFill>
-                <a:latin typeface="Microsoft YaHei"/>
-                <a:ea typeface="Microsoft YaHei"/>
-              </a:rPr>
-              <a:t>Tesla 与张祥前式的'转换式统一'没有实验依据，但他们的提问——世界背后是否有统一动力结构——是现代基础物理的真实问题。</a:t>
-            </a:r>
-          </a:p>
-        </p:txBody>
-      </p:sp>
-      <p:sp>
-        <p:nvSpPr>
-          <p:cNvPr id="6" name="TextBox 5"/>
-          <p:cNvSpPr txBox="1"/>
-          <p:nvPr/>
-        </p:nvSpPr>
-        <p:spPr>
-          <a:xfrm>
-            <a:off x="1371600" y="3108960"/>
-            <a:ext cx="1463040" cy="548640"/>
-          </a:xfrm>
-          <a:prstGeom prst="rect">
-            <a:avLst/>
-          </a:prstGeom>
-          <a:noFill/>
-        </p:spPr>
-        <p:txBody>
-          <a:bodyPr wrap="square">
-            <a:spAutoFit/>
-          </a:bodyPr>
-          <a:lstStyle/>
-          <a:p>
-            <a:pPr algn="l"/>
-            <a:r>
-              <a:rPr sz="1700" b="1">
-                <a:solidFill>
-                  <a:srgbClr val="C0392B"/>
-                </a:solidFill>
-                <a:latin typeface="Microsoft YaHei"/>
-                <a:ea typeface="Microsoft YaHei"/>
-              </a:rPr>
-              <a:t>物理层</a:t>
-            </a:r>
-          </a:p>
-        </p:txBody>
-      </p:sp>
-      <p:sp>
-        <p:nvSpPr>
-          <p:cNvPr id="7" name="TextBox 6"/>
-          <p:cNvSpPr txBox="1"/>
-          <p:nvPr/>
-        </p:nvSpPr>
-        <p:spPr>
-          <a:xfrm>
-            <a:off x="2926080" y="3108960"/>
-            <a:ext cx="7955279" cy="1097280"/>
-          </a:xfrm>
-          <a:prstGeom prst="rect">
-            <a:avLst/>
-          </a:prstGeom>
-          <a:noFill/>
-        </p:spPr>
-        <p:txBody>
-          <a:bodyPr wrap="square">
-            <a:spAutoFit/>
-          </a:bodyPr>
-          <a:lstStyle/>
-          <a:p>
-            <a:pPr algn="l"/>
-            <a:r>
-              <a:rPr sz="1400" b="0">
-                <a:solidFill>
-                  <a:srgbClr val="FFFFFF"/>
-                </a:solidFill>
-                <a:latin typeface="Microsoft YaHei"/>
-                <a:ea typeface="Microsoft YaHei"/>
-              </a:rPr>
-              <a:t>Gravity 是错误工程变量；Inertia 也是；唯一入口是 Tμν，而 Tμν 的正确工程名字叫'能量工程'。</a:t>
-            </a:r>
-          </a:p>
-        </p:txBody>
-      </p:sp>
-      <p:sp>
-        <p:nvSpPr>
-          <p:cNvPr id="8" name="TextBox 7"/>
-          <p:cNvSpPr txBox="1"/>
-          <p:nvPr/>
-        </p:nvSpPr>
-        <p:spPr>
-          <a:xfrm>
-            <a:off x="1371600" y="4434840"/>
-            <a:ext cx="1463040" cy="548640"/>
-          </a:xfrm>
-          <a:prstGeom prst="rect">
-            <a:avLst/>
-          </a:prstGeom>
-          <a:noFill/>
-        </p:spPr>
-        <p:txBody>
-          <a:bodyPr wrap="square">
-            <a:spAutoFit/>
-          </a:bodyPr>
-          <a:lstStyle/>
-          <a:p>
-            <a:pPr algn="l"/>
-            <a:r>
-              <a:rPr sz="1700" b="1">
-                <a:solidFill>
-                  <a:srgbClr val="C0392B"/>
-                </a:solidFill>
-                <a:latin typeface="Microsoft YaHei"/>
-                <a:ea typeface="Microsoft YaHei"/>
-              </a:rPr>
-              <a:t>前沿层</a:t>
-            </a:r>
-          </a:p>
-        </p:txBody>
-      </p:sp>
-      <p:sp>
-        <p:nvSpPr>
-          <p:cNvPr id="9" name="TextBox 8"/>
-          <p:cNvSpPr txBox="1"/>
-          <p:nvPr/>
-        </p:nvSpPr>
-        <p:spPr>
-          <a:xfrm>
-            <a:off x="2926080" y="4434840"/>
-            <a:ext cx="7955279" cy="1097280"/>
-          </a:xfrm>
-          <a:prstGeom prst="rect">
-            <a:avLst/>
-          </a:prstGeom>
-          <a:noFill/>
-        </p:spPr>
-        <p:txBody>
-          <a:bodyPr wrap="square">
-            <a:spAutoFit/>
-          </a:bodyPr>
-          <a:lstStyle/>
-          <a:p>
-            <a:pPr algn="l"/>
-            <a:r>
-              <a:rPr sz="1400" b="0">
-                <a:solidFill>
-                  <a:srgbClr val="FFFFFF"/>
-                </a:solidFill>
-                <a:latin typeface="Microsoft YaHei"/>
-                <a:ea typeface="Microsoft YaHei"/>
-              </a:rPr>
-              <a:t>Tμν 本身可能是派生的。真正的源变量候选：量子态、运动学代数、关系结构——每个都有已排期的实验。</a:t>
-            </a:r>
-          </a:p>
-        </p:txBody>
-      </p:sp>
-      <p:sp>
-        <p:nvSpPr>
-          <p:cNvPr id="10" name="TextBox 9"/>
-          <p:cNvSpPr txBox="1"/>
-          <p:nvPr/>
-        </p:nvSpPr>
-        <p:spPr>
-          <a:xfrm>
-            <a:off x="1097280" y="5806440"/>
-            <a:ext cx="10058400" cy="548640"/>
-          </a:xfrm>
-          <a:prstGeom prst="rect">
-            <a:avLst/>
-          </a:prstGeom>
-          <a:noFill/>
-        </p:spPr>
-        <p:txBody>
-          <a:bodyPr wrap="square">
-            <a:spAutoFit/>
-          </a:bodyPr>
-          <a:lstStyle/>
-          <a:p>
-            <a:pPr algn="ctr"/>
-            <a:r>
-              <a:rPr sz="1500" b="1">
-                <a:solidFill>
-                  <a:srgbClr val="F5C642"/>
-                </a:solidFill>
-                <a:latin typeface="Microsoft YaHei"/>
-                <a:ea typeface="Microsoft YaHei"/>
-              </a:rPr>
-              <a:t>反重力如果存在，不会是一台抵抗引力的机器——而地图的第一步已经完成：19 行，16 份脚本，全部可复现。</a:t>
-            </a:r>
-          </a:p>
-        </p:txBody>
-      </p:sp>
-      <p:sp>
-        <p:nvSpPr>
-          <p:cNvPr id="11" name="TextBox 10"/>
-          <p:cNvSpPr txBox="1"/>
-          <p:nvPr/>
-        </p:nvSpPr>
-        <p:spPr>
-          <a:xfrm>
-            <a:off x="502920" y="6446520"/>
-            <a:ext cx="9601200" cy="320040"/>
-          </a:xfrm>
-          <a:prstGeom prst="rect">
-            <a:avLst/>
-          </a:prstGeom>
-          <a:noFill/>
-        </p:spPr>
-        <p:txBody>
-          <a:bodyPr wrap="square">
-            <a:spAutoFit/>
-          </a:bodyPr>
-          <a:lstStyle/>
-          <a:p>
-            <a:pPr algn="l"/>
-            <a:r>
-              <a:rPr sz="900" b="0">
-                <a:solidFill>
-                  <a:srgbClr val="666666"/>
-                </a:solidFill>
-                <a:latin typeface="Microsoft YaHei"/>
-                <a:ea typeface="Microsoft YaHei"/>
-              </a:rPr>
-              <a:t/>
-            </a:r>
-          </a:p>
-        </p:txBody>
-      </p:sp>
-      <p:sp>
-        <p:nvSpPr>
-          <p:cNvPr id="12" name="TextBox 11"/>
           <p:cNvSpPr txBox="1"/>
           <p:nvPr/>
         </p:nvSpPr>
@@ -7595,7 +7439,7 @@
                 <a:latin typeface="Microsoft YaHei"/>
                 <a:ea typeface="Microsoft YaHei"/>
               </a:rPr>
-              <a:t>参考文献与代码</a:t>
+              <a:t>纠缠 → 几何：RT 极小面的玩具实现</a:t>
             </a:r>
           </a:p>
         </p:txBody>
@@ -7679,16 +7523,40 @@
           </a:p>
         </p:txBody>
       </p:sp>
-      <p:sp>
-        <p:nvSpPr>
-          <p:cNvPr id="5" name="TextBox 4"/>
+      <p:pic>
+        <p:nvPicPr>
+          <p:cNvPr id="5" name="Picture 4" descr="fig03_rt_mincut.png"/>
+          <p:cNvPicPr>
+            <a:picLocks noChangeAspect="1"/>
+          </p:cNvPicPr>
+          <p:nvPr/>
+        </p:nvPicPr>
+        <p:blipFill>
+          <a:blip r:embed="rId2"/>
+          <a:stretch>
+            <a:fillRect/>
+          </a:stretch>
+        </p:blipFill>
+        <p:spPr>
+          <a:xfrm>
+            <a:off x="1463040" y="1188720"/>
+            <a:ext cx="6583680" cy="5360164"/>
+          </a:xfrm>
+          <a:prstGeom prst="rect">
+            <a:avLst/>
+          </a:prstGeom>
+        </p:spPr>
+      </p:pic>
+      <p:sp>
+        <p:nvSpPr>
+          <p:cNvPr id="6" name="TextBox 5"/>
           <p:cNvSpPr txBox="1"/>
           <p:nvPr/>
         </p:nvSpPr>
         <p:spPr>
           <a:xfrm>
-            <a:off x="502920" y="1234440"/>
-            <a:ext cx="11155680" cy="4206240"/>
+            <a:off x="8321040" y="1371600"/>
+            <a:ext cx="3383280" cy="4206240"/>
           </a:xfrm>
           <a:prstGeom prst="rect">
             <a:avLst/>
@@ -7703,125 +7571,99 @@
           <a:p>
             <a:pPr algn="l"/>
             <a:r>
-              <a:rPr sz="1600" b="1">
+              <a:rPr sz="1400" b="1">
                 <a:solidFill>
                   <a:srgbClr val="1B1B2B"/>
                 </a:solidFill>
                 <a:latin typeface="Microsoft YaHei"/>
                 <a:ea typeface="Microsoft YaHei"/>
               </a:rPr>
-              <a:t>全部可复现资产：github.com/everest-an/Antigravity</a:t>
-            </a:r>
-          </a:p>
-          <a:p>
-            <a:pPr algn="l"/>
-            <a:r>
-              <a:rPr sz="1300" b="0">
+              <a:t>等距树张量网络中：</a:t>
+            </a:r>
+          </a:p>
+          <a:p>
+            <a:pPr algn="l"/>
+            <a:r>
+              <a:rPr sz="1400" b="0">
+                <a:solidFill>
+                  <a:srgbClr val="2980B9"/>
+                </a:solidFill>
+                <a:latin typeface="Microsoft YaHei"/>
+                <a:ea typeface="Microsoft YaHei"/>
+              </a:rPr>
+              <a:t>S₂(A) ≈ mincut(A)·lnχ</a:t>
+            </a:r>
+          </a:p>
+          <a:p>
+            <a:pPr algn="l"/>
+            <a:r>
+              <a:rPr sz="1200" b="0">
                 <a:solidFill>
                   <a:srgbClr val="1B1B2B"/>
                 </a:solidFill>
                 <a:latin typeface="Microsoft YaHei"/>
                 <a:ea typeface="Microsoft YaHei"/>
               </a:rPr>
-              <a:t>· 论文全稿：90 节 + 严谨化附件 A–G（中英双语，PDF 版在 build/ 目录）</a:t>
-            </a:r>
-          </a:p>
-          <a:p>
-            <a:pPr algn="l"/>
-            <a:r>
-              <a:rPr sz="1300" b="0">
+              <a:t>· 半树与相邻两叶同属 mincut=1 类——熵由极小面决定，而非 |A|</a:t>
+            </a:r>
+          </a:p>
+          <a:p>
+            <a:pPr algn="l"/>
+            <a:r>
+              <a:rPr sz="1200" b="0">
                 <a:solidFill>
                   <a:srgbClr val="1B1B2B"/>
                 </a:solidFill>
                 <a:latin typeface="Microsoft YaHei"/>
                 <a:ea typeface="Microsoft YaHei"/>
               </a:rPr>
-              <a:t>· 核算 9 份 + 模拟 7 份（run_all.py 一键全跑，0 失败）</a:t>
-            </a:r>
-          </a:p>
-          <a:p>
-            <a:pPr algn="l"/>
-            <a:r>
-              <a:rPr sz="1300" b="0">
+              <a:t>· 远离两叶给出 ~2 倍熵——'断开的极小面'（玩具层的相变骨架）</a:t>
+            </a:r>
+          </a:p>
+          <a:p>
+            <a:pPr algn="l"/>
+            <a:r>
+              <a:rPr sz="1200" b="0">
                 <a:solidFill>
                   <a:srgbClr val="1B1B2B"/>
                 </a:solidFill>
                 <a:latin typeface="Microsoft YaHei"/>
                 <a:ea typeface="Microsoft YaHei"/>
               </a:rPr>
-              <a:t>· 投稿图 5 幅（PNG + SVG，脚本生成）</a:t>
-            </a:r>
-          </a:p>
-          <a:p>
-            <a:pPr algn="l"/>
-            <a:r>
-              <a:rPr sz="1300" b="0">
+              <a:t>· 手写树与 quimb 原生两种独立实现互验</a:t>
+            </a:r>
+          </a:p>
+          <a:p>
+            <a:pPr algn="l"/>
+            <a:r>
+              <a:rPr sz="1200" b="0">
                 <a:solidFill>
                   <a:srgbClr val="1B1B2B"/>
                 </a:solidFill>
                 <a:latin typeface="Microsoft YaHei"/>
                 <a:ea typeface="Microsoft YaHei"/>
               </a:rPr>
-              <a:t>· 参考文献总表 ~110 条（含预印本/同行评议状态标注）</a:t>
-            </a:r>
-          </a:p>
-          <a:p>
-            <a:pPr algn="l"/>
-            <a:r>
-              <a:rPr sz="600" b="0">
-                <a:solidFill>
-                  <a:srgbClr val="1B1B2B"/>
-                </a:solidFill>
-                <a:latin typeface="Microsoft YaHei"/>
-                <a:ea typeface="Microsoft YaHei"/>
-              </a:rPr>
-              <a:t/>
-            </a:r>
-          </a:p>
-          <a:p>
-            <a:pPr algn="l"/>
-            <a:r>
-              <a:rPr sz="1150" b="0">
-                <a:solidFill>
-                  <a:srgbClr val="666666"/>
-                </a:solidFill>
-                <a:latin typeface="Microsoft YaHei"/>
-                <a:ea typeface="Microsoft YaHei"/>
-              </a:rPr>
-              <a:t>核心文献：Bose et al. PRL 2017 · Fedida–Kent PRD 2025 · Salzger–Vilasini arXiv:2605.08351 · GQuEST PRX 2025 · Derevianko et al. Colloquium 2026 · Bobrick–Martire CQG 2021 · Barzegar et al. arXiv:2602.16495</a:t>
-            </a:r>
-          </a:p>
-          <a:p>
-            <a:pPr algn="l"/>
-            <a:r>
-              <a:rPr sz="600" b="0">
-                <a:solidFill>
-                  <a:srgbClr val="1B1B2B"/>
-                </a:solidFill>
-                <a:latin typeface="Microsoft YaHei"/>
-                <a:ea typeface="Microsoft YaHei"/>
-              </a:rPr>
-              <a:t/>
-            </a:r>
-          </a:p>
-          <a:p>
-            <a:pPr algn="l"/>
-            <a:r>
-              <a:rPr sz="1100" b="0">
-                <a:solidFill>
-                  <a:srgbClr val="666666"/>
-                </a:solidFill>
-                <a:latin typeface="Microsoft YaHei"/>
-                <a:ea typeface="Microsoft YaHei"/>
-              </a:rPr>
-              <a:t>致谢：本汇报按 nature-skills（Yuan1z0825）的 nature-paper2ppt 工作流生成。</a:t>
-            </a:r>
-          </a:p>
-        </p:txBody>
-      </p:sp>
-      <p:sp>
-        <p:nvSpPr>
-          <p:cNvPr id="6" name="TextBox 5"/>
+              <a:t>· O(1/χ²) 有限键修正 = 大 N 极限的玩具对应</a:t>
+            </a:r>
+          </a:p>
+          <a:p>
+            <a:pPr algn="l"/>
+            <a:r>
+              <a:rPr sz="1200" b="1">
+                <a:solidFill>
+                  <a:srgbClr val="C0392B"/>
+                </a:solidFill>
+                <a:latin typeface="Microsoft YaHei"/>
+                <a:ea typeface="Microsoft YaHei"/>
+              </a:rPr>
+              <a:t>保真度声明：机制演示，不是'真实宇宙由张量网络构成'的证据（判决矩阵第 18 行，C 级）。</a:t>
+            </a:r>
+          </a:p>
+        </p:txBody>
+      </p:sp>
+      <p:sp>
+        <p:nvSpPr>
+          <p:cNvPr id="7" name="TextBox 6"/>
           <p:cNvSpPr txBox="1"/>
           <p:nvPr/>
         </p:nvSpPr>
@@ -7850,14 +7692,14 @@
                 <a:latin typeface="Microsoft YaHei"/>
                 <a:ea typeface="Microsoft YaHei"/>
               </a:rPr>
-              <a:t/>
-            </a:r>
-          </a:p>
-        </p:txBody>
-      </p:sp>
-      <p:sp>
-        <p:nvSpPr>
-          <p:cNvPr id="7" name="TextBox 6"/>
+              <a:t>图 3：RT 极小面互验（模拟 05/07）</a:t>
+            </a:r>
+          </a:p>
+        </p:txBody>
+      </p:sp>
+      <p:sp>
+        <p:nvSpPr>
+          <p:cNvPr id="8" name="TextBox 7"/>
           <p:cNvSpPr txBox="1"/>
           <p:nvPr/>
         </p:nvSpPr>
@@ -7887,6 +7729,1445 @@
                 <a:ea typeface="Microsoft YaHei"/>
               </a:rPr>
               <a:t>15</a:t>
+            </a:r>
+          </a:p>
+        </p:txBody>
+      </p:sp>
+    </p:spTree>
+  </p:cSld>
+  <p:clrMapOvr>
+    <a:masterClrMapping/>
+  </p:clrMapOvr>
+</p:sld>
+</file>
+
+<file path=ppt/slides/slide16.xml><?xml version="1.0" encoding="utf-8"?>
+<p:sld xmlns:a="http://schemas.openxmlformats.org/drawingml/2006/main" xmlns:p="http://schemas.openxmlformats.org/presentationml/2006/main" xmlns:r="http://schemas.openxmlformats.org/officeDocument/2006/relationships">
+  <p:cSld>
+    <p:spTree>
+      <p:nvGrpSpPr>
+        <p:cNvPr id="1" name=""/>
+        <p:cNvGrpSpPr/>
+        <p:nvPr/>
+      </p:nvGrpSpPr>
+      <p:grpSpPr/>
+      <p:sp>
+        <p:nvSpPr>
+          <p:cNvPr id="2" name="TextBox 1"/>
+          <p:cNvSpPr txBox="1"/>
+          <p:nvPr/>
+        </p:nvSpPr>
+        <p:spPr>
+          <a:xfrm>
+            <a:off x="502920" y="256032"/>
+            <a:ext cx="11155680" cy="640080"/>
+          </a:xfrm>
+          <a:prstGeom prst="rect">
+            <a:avLst/>
+          </a:prstGeom>
+          <a:noFill/>
+        </p:spPr>
+        <p:txBody>
+          <a:bodyPr wrap="square">
+            <a:spAutoFit/>
+          </a:bodyPr>
+          <a:lstStyle/>
+          <a:p>
+            <a:pPr algn="l"/>
+            <a:r>
+              <a:rPr sz="2500" b="1">
+                <a:solidFill>
+                  <a:srgbClr val="C0392B"/>
+                </a:solidFill>
+                <a:latin typeface="Microsoft YaHei"/>
+                <a:ea typeface="Microsoft YaHei"/>
+              </a:rPr>
+              <a:t>未来方向：近 / 中 / 远期行动清单</a:t>
+            </a:r>
+          </a:p>
+        </p:txBody>
+      </p:sp>
+      <p:sp>
+        <p:nvSpPr>
+          <p:cNvPr id="3" name="Rectangle 2"/>
+          <p:cNvSpPr/>
+          <p:nvPr/>
+        </p:nvSpPr>
+        <p:spPr>
+          <a:xfrm>
+            <a:off x="530352" y="896112"/>
+            <a:ext cx="2194560" cy="27940"/>
+          </a:xfrm>
+          <a:prstGeom prst="rect">
+            <a:avLst/>
+          </a:prstGeom>
+          <a:solidFill>
+            <a:srgbClr val="C0392B"/>
+          </a:solidFill>
+          <a:ln>
+            <a:noFill/>
+          </a:ln>
+        </p:spPr>
+        <p:style>
+          <a:lnRef idx="1">
+            <a:schemeClr val="accent1"/>
+          </a:lnRef>
+          <a:fillRef idx="3">
+            <a:schemeClr val="accent1"/>
+          </a:fillRef>
+          <a:effectRef idx="2">
+            <a:schemeClr val="accent1"/>
+          </a:effectRef>
+          <a:fontRef idx="minor">
+            <a:schemeClr val="lt1"/>
+          </a:fontRef>
+        </p:style>
+        <p:txBody>
+          <a:bodyPr rtlCol="0" anchor="ctr"/>
+          <a:lstStyle/>
+          <a:p>
+            <a:pPr algn="ctr"/>
+          </a:p>
+        </p:txBody>
+      </p:sp>
+      <p:sp>
+        <p:nvSpPr>
+          <p:cNvPr id="4" name="TextBox 3"/>
+          <p:cNvSpPr txBox="1"/>
+          <p:nvPr/>
+        </p:nvSpPr>
+        <p:spPr>
+          <a:xfrm>
+            <a:off x="11292840" y="137160"/>
+            <a:ext cx="731520" cy="457200"/>
+          </a:xfrm>
+          <a:prstGeom prst="rect">
+            <a:avLst/>
+          </a:prstGeom>
+          <a:noFill/>
+        </p:spPr>
+        <p:txBody>
+          <a:bodyPr wrap="square">
+            <a:spAutoFit/>
+          </a:bodyPr>
+          <a:lstStyle/>
+          <a:p>
+            <a:pPr algn="r"/>
+            <a:r>
+              <a:rPr sz="1300" b="1">
+                <a:solidFill>
+                  <a:srgbClr val="666666"/>
+                </a:solidFill>
+                <a:latin typeface="Microsoft YaHei"/>
+                <a:ea typeface="Microsoft YaHei"/>
+              </a:rPr>
+              <a:t>16</a:t>
+            </a:r>
+          </a:p>
+        </p:txBody>
+      </p:sp>
+      <p:sp>
+        <p:nvSpPr>
+          <p:cNvPr id="5" name="Rectangle 4"/>
+          <p:cNvSpPr/>
+          <p:nvPr/>
+        </p:nvSpPr>
+        <p:spPr>
+          <a:xfrm>
+            <a:off x="502920" y="1188720"/>
+            <a:ext cx="3566160" cy="4663440"/>
+          </a:xfrm>
+          <a:prstGeom prst="rect">
+            <a:avLst/>
+          </a:prstGeom>
+          <a:solidFill>
+            <a:srgbClr val="F5F5F7"/>
+          </a:solidFill>
+          <a:ln w="17780">
+            <a:solidFill>
+              <a:srgbClr val="27AE60"/>
+            </a:solidFill>
+          </a:ln>
+        </p:spPr>
+        <p:style>
+          <a:lnRef idx="1">
+            <a:schemeClr val="accent1"/>
+          </a:lnRef>
+          <a:fillRef idx="3">
+            <a:schemeClr val="accent1"/>
+          </a:fillRef>
+          <a:effectRef idx="2">
+            <a:schemeClr val="accent1"/>
+          </a:effectRef>
+          <a:fontRef idx="minor">
+            <a:schemeClr val="lt1"/>
+          </a:fontRef>
+        </p:style>
+        <p:txBody>
+          <a:bodyPr rtlCol="0" anchor="ctr"/>
+          <a:lstStyle/>
+          <a:p>
+            <a:pPr algn="ctr"/>
+          </a:p>
+        </p:txBody>
+      </p:sp>
+      <p:sp>
+        <p:nvSpPr>
+          <p:cNvPr id="6" name="TextBox 5"/>
+          <p:cNvSpPr txBox="1"/>
+          <p:nvPr/>
+        </p:nvSpPr>
+        <p:spPr>
+          <a:xfrm>
+            <a:off x="612648" y="1280160"/>
+            <a:ext cx="3383280" cy="457200"/>
+          </a:xfrm>
+          <a:prstGeom prst="rect">
+            <a:avLst/>
+          </a:prstGeom>
+          <a:noFill/>
+        </p:spPr>
+        <p:txBody>
+          <a:bodyPr wrap="square">
+            <a:spAutoFit/>
+          </a:bodyPr>
+          <a:lstStyle/>
+          <a:p>
+            <a:pPr algn="l"/>
+            <a:r>
+              <a:rPr sz="1500" b="1">
+                <a:solidFill>
+                  <a:srgbClr val="27AE60"/>
+                </a:solidFill>
+                <a:latin typeface="Microsoft YaHei"/>
+                <a:ea typeface="Microsoft YaHei"/>
+              </a:rPr>
+              <a:t>近期 3–5 年</a:t>
+            </a:r>
+          </a:p>
+        </p:txBody>
+      </p:sp>
+      <p:sp>
+        <p:nvSpPr>
+          <p:cNvPr id="7" name="TextBox 6"/>
+          <p:cNvSpPr txBox="1"/>
+          <p:nvPr/>
+        </p:nvSpPr>
+        <p:spPr>
+          <a:xfrm>
+            <a:off x="612648" y="1783080"/>
+            <a:ext cx="3383280" cy="3840480"/>
+          </a:xfrm>
+          <a:prstGeom prst="rect">
+            <a:avLst/>
+          </a:prstGeom>
+          <a:noFill/>
+        </p:spPr>
+        <p:txBody>
+          <a:bodyPr wrap="square">
+            <a:spAutoFit/>
+          </a:bodyPr>
+          <a:lstStyle/>
+          <a:p>
+            <a:pPr algn="l"/>
+            <a:r>
+              <a:rPr sz="1150" b="0">
+                <a:solidFill>
+                  <a:srgbClr val="1B1B2B"/>
+                </a:solidFill>
+                <a:latin typeface="Microsoft YaHei"/>
+                <a:ea typeface="Microsoft YaHei"/>
+              </a:rPr>
+              <a:t>· GQuEST 首轮数据（第 15 行）</a:t>
+            </a:r>
+          </a:p>
+          <a:p>
+            <a:pPr algn="l"/>
+            <a:r>
+              <a:rPr sz="1150" b="0">
+                <a:solidFill>
+                  <a:srgbClr val="1B1B2B"/>
+                </a:solidFill>
+                <a:latin typeface="Microsoft YaHei"/>
+                <a:ea typeface="Microsoft YaHei"/>
+              </a:rPr>
+              <a:t>· reservoir-engineered GIE（Q 因子降一个量级）</a:t>
+            </a:r>
+          </a:p>
+          <a:p>
+            <a:pPr algn="l"/>
+            <a:r>
+              <a:rPr sz="1150" b="0">
+                <a:solidFill>
+                  <a:srgbClr val="1B1B2B"/>
+                </a:solidFill>
+                <a:latin typeface="Microsoft YaHei"/>
+                <a:ea typeface="Microsoft YaHei"/>
+              </a:rPr>
+              <a:t>· CSS WEP 系统误差账本</a:t>
+            </a:r>
+          </a:p>
+          <a:p>
+            <a:pPr algn="l"/>
+            <a:r>
+              <a:rPr sz="1150" b="0">
+                <a:solidFill>
+                  <a:srgbClr val="1B1B2B"/>
+                </a:solidFill>
+                <a:latin typeface="Microsoft YaHei"/>
+                <a:ea typeface="Microsoft YaHei"/>
+              </a:rPr>
+              <a:t>· 钍核钟 10⁻¹⁸ 稳定度</a:t>
+            </a:r>
+          </a:p>
+          <a:p>
+            <a:pPr algn="l"/>
+            <a:r>
+              <a:rPr sz="1150" b="0">
+                <a:solidFill>
+                  <a:srgbClr val="1B1B2B"/>
+                </a:solidFill>
+                <a:latin typeface="Microsoft YaHei"/>
+                <a:ea typeface="Microsoft YaHei"/>
+              </a:rPr>
+              <a:t>· Céleri 反冲约束实验验证</a:t>
+            </a:r>
+          </a:p>
+        </p:txBody>
+      </p:sp>
+      <p:sp>
+        <p:nvSpPr>
+          <p:cNvPr id="8" name="Rectangle 7"/>
+          <p:cNvSpPr/>
+          <p:nvPr/>
+        </p:nvSpPr>
+        <p:spPr>
+          <a:xfrm>
+            <a:off x="4343400" y="1188720"/>
+            <a:ext cx="3566160" cy="4663440"/>
+          </a:xfrm>
+          <a:prstGeom prst="rect">
+            <a:avLst/>
+          </a:prstGeom>
+          <a:solidFill>
+            <a:srgbClr val="F5F5F7"/>
+          </a:solidFill>
+          <a:ln w="17780">
+            <a:solidFill>
+              <a:srgbClr val="2980B9"/>
+            </a:solidFill>
+          </a:ln>
+        </p:spPr>
+        <p:style>
+          <a:lnRef idx="1">
+            <a:schemeClr val="accent1"/>
+          </a:lnRef>
+          <a:fillRef idx="3">
+            <a:schemeClr val="accent1"/>
+          </a:fillRef>
+          <a:effectRef idx="2">
+            <a:schemeClr val="accent1"/>
+          </a:effectRef>
+          <a:fontRef idx="minor">
+            <a:schemeClr val="lt1"/>
+          </a:fontRef>
+        </p:style>
+        <p:txBody>
+          <a:bodyPr rtlCol="0" anchor="ctr"/>
+          <a:lstStyle/>
+          <a:p>
+            <a:pPr algn="ctr"/>
+          </a:p>
+        </p:txBody>
+      </p:sp>
+      <p:sp>
+        <p:nvSpPr>
+          <p:cNvPr id="9" name="TextBox 8"/>
+          <p:cNvSpPr txBox="1"/>
+          <p:nvPr/>
+        </p:nvSpPr>
+        <p:spPr>
+          <a:xfrm>
+            <a:off x="4453128" y="1280160"/>
+            <a:ext cx="3383280" cy="457200"/>
+          </a:xfrm>
+          <a:prstGeom prst="rect">
+            <a:avLst/>
+          </a:prstGeom>
+          <a:noFill/>
+        </p:spPr>
+        <p:txBody>
+          <a:bodyPr wrap="square">
+            <a:spAutoFit/>
+          </a:bodyPr>
+          <a:lstStyle/>
+          <a:p>
+            <a:pPr algn="l"/>
+            <a:r>
+              <a:rPr sz="1500" b="1">
+                <a:solidFill>
+                  <a:srgbClr val="2980B9"/>
+                </a:solidFill>
+                <a:latin typeface="Microsoft YaHei"/>
+                <a:ea typeface="Microsoft YaHei"/>
+              </a:rPr>
+              <a:t>中期 5–10 年</a:t>
+            </a:r>
+          </a:p>
+        </p:txBody>
+      </p:sp>
+      <p:sp>
+        <p:nvSpPr>
+          <p:cNvPr id="10" name="TextBox 9"/>
+          <p:cNvSpPr txBox="1"/>
+          <p:nvPr/>
+        </p:nvSpPr>
+        <p:spPr>
+          <a:xfrm>
+            <a:off x="4453128" y="1783080"/>
+            <a:ext cx="3383280" cy="3840480"/>
+          </a:xfrm>
+          <a:prstGeom prst="rect">
+            <a:avLst/>
+          </a:prstGeom>
+          <a:noFill/>
+        </p:spPr>
+        <p:txBody>
+          <a:bodyPr wrap="square">
+            <a:spAutoFit/>
+          </a:bodyPr>
+          <a:lstStyle/>
+          <a:p>
+            <a:pPr algn="l"/>
+            <a:r>
+              <a:rPr sz="1150" b="0">
+                <a:solidFill>
+                  <a:srgbClr val="1B1B2B"/>
+                </a:solidFill>
+                <a:latin typeface="Microsoft YaHei"/>
+                <a:ea typeface="Microsoft YaHei"/>
+              </a:rPr>
+              <a:t>· QGEM 首轮（纳米金刚石 SGI）</a:t>
+            </a:r>
+          </a:p>
+          <a:p>
+            <a:pPr algn="l"/>
+            <a:r>
+              <a:rPr sz="1150" b="0">
+                <a:solidFill>
+                  <a:srgbClr val="1B1B2B"/>
+                </a:solidFill>
+                <a:latin typeface="Microsoft YaHei"/>
+                <a:ea typeface="Microsoft YaHei"/>
+              </a:rPr>
+              <a:t>· 引力 AB 的区分几何设计</a:t>
+            </a:r>
+          </a:p>
+          <a:p>
+            <a:pPr algn="l"/>
+            <a:r>
+              <a:rPr sz="1150" b="0">
+                <a:solidFill>
+                  <a:srgbClr val="1B1B2B"/>
+                </a:solidFill>
+                <a:latin typeface="Microsoft YaHei"/>
+                <a:ea typeface="Microsoft YaHei"/>
+              </a:rPr>
+              <a:t>· LMT 10⁻¹⁷ WEP（STE-QUEST 规格）</a:t>
+            </a:r>
+          </a:p>
+          <a:p>
+            <a:pPr algn="l"/>
+            <a:r>
+              <a:rPr sz="1150" b="0">
+                <a:solidFill>
+                  <a:srgbClr val="1B1B2B"/>
+                </a:solidFill>
+                <a:latin typeface="Microsoft YaHei"/>
+                <a:ea typeface="Microsoft YaHei"/>
+              </a:rPr>
+              <a:t>· MAQRO 级空间任务（坍缩模型判决）</a:t>
+            </a:r>
+          </a:p>
+        </p:txBody>
+      </p:sp>
+      <p:sp>
+        <p:nvSpPr>
+          <p:cNvPr id="11" name="Rectangle 10"/>
+          <p:cNvSpPr/>
+          <p:nvPr/>
+        </p:nvSpPr>
+        <p:spPr>
+          <a:xfrm>
+            <a:off x="8183880" y="1188720"/>
+            <a:ext cx="3566160" cy="4663440"/>
+          </a:xfrm>
+          <a:prstGeom prst="rect">
+            <a:avLst/>
+          </a:prstGeom>
+          <a:solidFill>
+            <a:srgbClr val="F5F5F7"/>
+          </a:solidFill>
+          <a:ln w="17780">
+            <a:solidFill>
+              <a:srgbClr val="8E44AD"/>
+            </a:solidFill>
+          </a:ln>
+        </p:spPr>
+        <p:style>
+          <a:lnRef idx="1">
+            <a:schemeClr val="accent1"/>
+          </a:lnRef>
+          <a:fillRef idx="3">
+            <a:schemeClr val="accent1"/>
+          </a:fillRef>
+          <a:effectRef idx="2">
+            <a:schemeClr val="accent1"/>
+          </a:effectRef>
+          <a:fontRef idx="minor">
+            <a:schemeClr val="lt1"/>
+          </a:fontRef>
+        </p:style>
+        <p:txBody>
+          <a:bodyPr rtlCol="0" anchor="ctr"/>
+          <a:lstStyle/>
+          <a:p>
+            <a:pPr algn="ctr"/>
+          </a:p>
+        </p:txBody>
+      </p:sp>
+      <p:sp>
+        <p:nvSpPr>
+          <p:cNvPr id="12" name="TextBox 11"/>
+          <p:cNvSpPr txBox="1"/>
+          <p:nvPr/>
+        </p:nvSpPr>
+        <p:spPr>
+          <a:xfrm>
+            <a:off x="8293608" y="1280160"/>
+            <a:ext cx="3383280" cy="457200"/>
+          </a:xfrm>
+          <a:prstGeom prst="rect">
+            <a:avLst/>
+          </a:prstGeom>
+          <a:noFill/>
+        </p:spPr>
+        <p:txBody>
+          <a:bodyPr wrap="square">
+            <a:spAutoFit/>
+          </a:bodyPr>
+          <a:lstStyle/>
+          <a:p>
+            <a:pPr algn="l"/>
+            <a:r>
+              <a:rPr sz="1500" b="1">
+                <a:solidFill>
+                  <a:srgbClr val="8E44AD"/>
+                </a:solidFill>
+                <a:latin typeface="Microsoft YaHei"/>
+                <a:ea typeface="Microsoft YaHei"/>
+              </a:rPr>
+              <a:t>远期 10 年+</a:t>
+            </a:r>
+          </a:p>
+        </p:txBody>
+      </p:sp>
+      <p:sp>
+        <p:nvSpPr>
+          <p:cNvPr id="13" name="TextBox 12"/>
+          <p:cNvSpPr txBox="1"/>
+          <p:nvPr/>
+        </p:nvSpPr>
+        <p:spPr>
+          <a:xfrm>
+            <a:off x="8293608" y="1783080"/>
+            <a:ext cx="3383280" cy="3840480"/>
+          </a:xfrm>
+          <a:prstGeom prst="rect">
+            <a:avLst/>
+          </a:prstGeom>
+          <a:noFill/>
+        </p:spPr>
+        <p:txBody>
+          <a:bodyPr wrap="square">
+            <a:spAutoFit/>
+          </a:bodyPr>
+          <a:lstStyle/>
+          <a:p>
+            <a:pPr algn="l"/>
+            <a:r>
+              <a:rPr sz="1150" b="0">
+                <a:solidFill>
+                  <a:srgbClr val="1B1B2B"/>
+                </a:solidFill>
+                <a:latin typeface="Microsoft YaHei"/>
+                <a:ea typeface="Microsoft YaHei"/>
+              </a:rPr>
+              <a:t>· frame-dragging GIE（缺口 ~7 量级）</a:t>
+            </a:r>
+          </a:p>
+          <a:p>
+            <a:pPr algn="l"/>
+            <a:r>
+              <a:rPr sz="1150" b="0">
+                <a:solidFill>
+                  <a:srgbClr val="1B1B2B"/>
+                </a:solidFill>
+                <a:latin typeface="Microsoft YaHei"/>
+                <a:ea typeface="Microsoft YaHei"/>
+              </a:rPr>
+              <a:t>· bolometric 引力子噪声</a:t>
+            </a:r>
+          </a:p>
+          <a:p>
+            <a:pPr algn="l"/>
+            <a:r>
+              <a:rPr sz="1150" b="0">
+                <a:solidFill>
+                  <a:srgbClr val="1B1B2B"/>
+                </a:solidFill>
+                <a:latin typeface="Microsoft YaHei"/>
+                <a:ea typeface="Microsoft YaHei"/>
+              </a:rPr>
+              <a:t>· 量子因果结构（Hardy QEP）</a:t>
+            </a:r>
+          </a:p>
+        </p:txBody>
+      </p:sp>
+      <p:sp>
+        <p:nvSpPr>
+          <p:cNvPr id="14" name="TextBox 13"/>
+          <p:cNvSpPr txBox="1"/>
+          <p:nvPr/>
+        </p:nvSpPr>
+        <p:spPr>
+          <a:xfrm>
+            <a:off x="502920" y="6446520"/>
+            <a:ext cx="9601200" cy="320040"/>
+          </a:xfrm>
+          <a:prstGeom prst="rect">
+            <a:avLst/>
+          </a:prstGeom>
+          <a:noFill/>
+        </p:spPr>
+        <p:txBody>
+          <a:bodyPr wrap="square">
+            <a:spAutoFit/>
+          </a:bodyPr>
+          <a:lstStyle/>
+          <a:p>
+            <a:pPr algn="l"/>
+            <a:r>
+              <a:rPr sz="900" b="0">
+                <a:solidFill>
+                  <a:srgbClr val="666666"/>
+                </a:solidFill>
+                <a:latin typeface="Microsoft YaHei"/>
+                <a:ea typeface="Microsoft YaHei"/>
+              </a:rPr>
+              <a:t>来源：物理现实的工程学边界.md 第八十八节（12 条行动清单）</a:t>
+            </a:r>
+          </a:p>
+        </p:txBody>
+      </p:sp>
+      <p:sp>
+        <p:nvSpPr>
+          <p:cNvPr id="15" name="TextBox 14"/>
+          <p:cNvSpPr txBox="1"/>
+          <p:nvPr/>
+        </p:nvSpPr>
+        <p:spPr>
+          <a:xfrm>
+            <a:off x="11247120" y="6446520"/>
+            <a:ext cx="731520" cy="320040"/>
+          </a:xfrm>
+          <a:prstGeom prst="rect">
+            <a:avLst/>
+          </a:prstGeom>
+          <a:noFill/>
+        </p:spPr>
+        <p:txBody>
+          <a:bodyPr wrap="square">
+            <a:spAutoFit/>
+          </a:bodyPr>
+          <a:lstStyle/>
+          <a:p>
+            <a:pPr algn="r"/>
+            <a:r>
+              <a:rPr sz="900" b="0">
+                <a:solidFill>
+                  <a:srgbClr val="666666"/>
+                </a:solidFill>
+                <a:latin typeface="Microsoft YaHei"/>
+                <a:ea typeface="Microsoft YaHei"/>
+              </a:rPr>
+              <a:t>16</a:t>
+            </a:r>
+          </a:p>
+        </p:txBody>
+      </p:sp>
+    </p:spTree>
+  </p:cSld>
+  <p:clrMapOvr>
+    <a:masterClrMapping/>
+  </p:clrMapOvr>
+</p:sld>
+</file>
+
+<file path=ppt/slides/slide17.xml><?xml version="1.0" encoding="utf-8"?>
+<p:sld xmlns:a="http://schemas.openxmlformats.org/drawingml/2006/main" xmlns:p="http://schemas.openxmlformats.org/presentationml/2006/main" xmlns:r="http://schemas.openxmlformats.org/officeDocument/2006/relationships">
+  <p:cSld>
+    <p:spTree>
+      <p:nvGrpSpPr>
+        <p:cNvPr id="1" name=""/>
+        <p:cNvGrpSpPr/>
+        <p:nvPr/>
+      </p:nvGrpSpPr>
+      <p:grpSpPr/>
+      <p:sp>
+        <p:nvSpPr>
+          <p:cNvPr id="2" name="Rectangle 1"/>
+          <p:cNvSpPr/>
+          <p:nvPr/>
+        </p:nvSpPr>
+        <p:spPr>
+          <a:xfrm>
+            <a:off x="0" y="0"/>
+            <a:ext cx="12191695" cy="6858000"/>
+          </a:xfrm>
+          <a:prstGeom prst="rect">
+            <a:avLst/>
+          </a:prstGeom>
+          <a:solidFill>
+            <a:srgbClr val="1B1B2B"/>
+          </a:solidFill>
+          <a:ln>
+            <a:noFill/>
+          </a:ln>
+        </p:spPr>
+        <p:style>
+          <a:lnRef idx="1">
+            <a:schemeClr val="accent1"/>
+          </a:lnRef>
+          <a:fillRef idx="3">
+            <a:schemeClr val="accent1"/>
+          </a:fillRef>
+          <a:effectRef idx="2">
+            <a:schemeClr val="accent1"/>
+          </a:effectRef>
+          <a:fontRef idx="minor">
+            <a:schemeClr val="lt1"/>
+          </a:fontRef>
+        </p:style>
+        <p:txBody>
+          <a:bodyPr rtlCol="0" anchor="ctr"/>
+          <a:lstStyle/>
+          <a:p>
+            <a:pPr algn="ctr"/>
+          </a:p>
+        </p:txBody>
+      </p:sp>
+      <p:sp>
+        <p:nvSpPr>
+          <p:cNvPr id="3" name="TextBox 2"/>
+          <p:cNvSpPr txBox="1"/>
+          <p:nvPr/>
+        </p:nvSpPr>
+        <p:spPr>
+          <a:xfrm>
+            <a:off x="1097280" y="1005840"/>
+            <a:ext cx="10058400" cy="640080"/>
+          </a:xfrm>
+          <a:prstGeom prst="rect">
+            <a:avLst/>
+          </a:prstGeom>
+          <a:noFill/>
+        </p:spPr>
+        <p:txBody>
+          <a:bodyPr wrap="square">
+            <a:spAutoFit/>
+          </a:bodyPr>
+          <a:lstStyle/>
+          <a:p>
+            <a:pPr algn="ctr"/>
+            <a:r>
+              <a:rPr sz="2800" b="1">
+                <a:solidFill>
+                  <a:srgbClr val="FFFFFF"/>
+                </a:solidFill>
+                <a:latin typeface="Microsoft YaHei"/>
+                <a:ea typeface="Microsoft YaHei"/>
+              </a:rPr>
+              <a:t>总结：核心命题三层</a:t>
+            </a:r>
+          </a:p>
+        </p:txBody>
+      </p:sp>
+      <p:sp>
+        <p:nvSpPr>
+          <p:cNvPr id="4" name="TextBox 3"/>
+          <p:cNvSpPr txBox="1"/>
+          <p:nvPr/>
+        </p:nvSpPr>
+        <p:spPr>
+          <a:xfrm>
+            <a:off x="1371600" y="1783080"/>
+            <a:ext cx="1463040" cy="548640"/>
+          </a:xfrm>
+          <a:prstGeom prst="rect">
+            <a:avLst/>
+          </a:prstGeom>
+          <a:noFill/>
+        </p:spPr>
+        <p:txBody>
+          <a:bodyPr wrap="square">
+            <a:spAutoFit/>
+          </a:bodyPr>
+          <a:lstStyle/>
+          <a:p>
+            <a:pPr algn="l"/>
+            <a:r>
+              <a:rPr sz="1700" b="1">
+                <a:solidFill>
+                  <a:srgbClr val="C0392B"/>
+                </a:solidFill>
+                <a:latin typeface="Microsoft YaHei"/>
+                <a:ea typeface="Microsoft YaHei"/>
+              </a:rPr>
+              <a:t>历史层</a:t>
+            </a:r>
+          </a:p>
+        </p:txBody>
+      </p:sp>
+      <p:sp>
+        <p:nvSpPr>
+          <p:cNvPr id="5" name="TextBox 4"/>
+          <p:cNvSpPr txBox="1"/>
+          <p:nvPr/>
+        </p:nvSpPr>
+        <p:spPr>
+          <a:xfrm>
+            <a:off x="2926080" y="1783080"/>
+            <a:ext cx="7955279" cy="1097280"/>
+          </a:xfrm>
+          <a:prstGeom prst="rect">
+            <a:avLst/>
+          </a:prstGeom>
+          <a:noFill/>
+        </p:spPr>
+        <p:txBody>
+          <a:bodyPr wrap="square">
+            <a:spAutoFit/>
+          </a:bodyPr>
+          <a:lstStyle/>
+          <a:p>
+            <a:pPr algn="l"/>
+            <a:r>
+              <a:rPr sz="1400" b="0">
+                <a:solidFill>
+                  <a:srgbClr val="FFFFFF"/>
+                </a:solidFill>
+                <a:latin typeface="Microsoft YaHei"/>
+                <a:ea typeface="Microsoft YaHei"/>
+              </a:rPr>
+              <a:t>Tesla 与张祥前式的'转换式统一'没有实验依据，但他们的提问——世界背后是否有统一动力结构——是现代基础物理的真实问题。</a:t>
+            </a:r>
+          </a:p>
+        </p:txBody>
+      </p:sp>
+      <p:sp>
+        <p:nvSpPr>
+          <p:cNvPr id="6" name="TextBox 5"/>
+          <p:cNvSpPr txBox="1"/>
+          <p:nvPr/>
+        </p:nvSpPr>
+        <p:spPr>
+          <a:xfrm>
+            <a:off x="1371600" y="3108960"/>
+            <a:ext cx="1463040" cy="548640"/>
+          </a:xfrm>
+          <a:prstGeom prst="rect">
+            <a:avLst/>
+          </a:prstGeom>
+          <a:noFill/>
+        </p:spPr>
+        <p:txBody>
+          <a:bodyPr wrap="square">
+            <a:spAutoFit/>
+          </a:bodyPr>
+          <a:lstStyle/>
+          <a:p>
+            <a:pPr algn="l"/>
+            <a:r>
+              <a:rPr sz="1700" b="1">
+                <a:solidFill>
+                  <a:srgbClr val="C0392B"/>
+                </a:solidFill>
+                <a:latin typeface="Microsoft YaHei"/>
+                <a:ea typeface="Microsoft YaHei"/>
+              </a:rPr>
+              <a:t>物理层</a:t>
+            </a:r>
+          </a:p>
+        </p:txBody>
+      </p:sp>
+      <p:sp>
+        <p:nvSpPr>
+          <p:cNvPr id="7" name="TextBox 6"/>
+          <p:cNvSpPr txBox="1"/>
+          <p:nvPr/>
+        </p:nvSpPr>
+        <p:spPr>
+          <a:xfrm>
+            <a:off x="2926080" y="3108960"/>
+            <a:ext cx="7955279" cy="1097280"/>
+          </a:xfrm>
+          <a:prstGeom prst="rect">
+            <a:avLst/>
+          </a:prstGeom>
+          <a:noFill/>
+        </p:spPr>
+        <p:txBody>
+          <a:bodyPr wrap="square">
+            <a:spAutoFit/>
+          </a:bodyPr>
+          <a:lstStyle/>
+          <a:p>
+            <a:pPr algn="l"/>
+            <a:r>
+              <a:rPr sz="1400" b="0">
+                <a:solidFill>
+                  <a:srgbClr val="FFFFFF"/>
+                </a:solidFill>
+                <a:latin typeface="Microsoft YaHei"/>
+                <a:ea typeface="Microsoft YaHei"/>
+              </a:rPr>
+              <a:t>Gravity 是错误工程变量；Inertia 也是；唯一入口是 Tμν，而 Tμν 的正确工程名字叫'能量工程'。</a:t>
+            </a:r>
+          </a:p>
+        </p:txBody>
+      </p:sp>
+      <p:sp>
+        <p:nvSpPr>
+          <p:cNvPr id="8" name="TextBox 7"/>
+          <p:cNvSpPr txBox="1"/>
+          <p:nvPr/>
+        </p:nvSpPr>
+        <p:spPr>
+          <a:xfrm>
+            <a:off x="1371600" y="4434840"/>
+            <a:ext cx="1463040" cy="548640"/>
+          </a:xfrm>
+          <a:prstGeom prst="rect">
+            <a:avLst/>
+          </a:prstGeom>
+          <a:noFill/>
+        </p:spPr>
+        <p:txBody>
+          <a:bodyPr wrap="square">
+            <a:spAutoFit/>
+          </a:bodyPr>
+          <a:lstStyle/>
+          <a:p>
+            <a:pPr algn="l"/>
+            <a:r>
+              <a:rPr sz="1700" b="1">
+                <a:solidFill>
+                  <a:srgbClr val="C0392B"/>
+                </a:solidFill>
+                <a:latin typeface="Microsoft YaHei"/>
+                <a:ea typeface="Microsoft YaHei"/>
+              </a:rPr>
+              <a:t>前沿层</a:t>
+            </a:r>
+          </a:p>
+        </p:txBody>
+      </p:sp>
+      <p:sp>
+        <p:nvSpPr>
+          <p:cNvPr id="9" name="TextBox 8"/>
+          <p:cNvSpPr txBox="1"/>
+          <p:nvPr/>
+        </p:nvSpPr>
+        <p:spPr>
+          <a:xfrm>
+            <a:off x="2926080" y="4434840"/>
+            <a:ext cx="7955279" cy="1097280"/>
+          </a:xfrm>
+          <a:prstGeom prst="rect">
+            <a:avLst/>
+          </a:prstGeom>
+          <a:noFill/>
+        </p:spPr>
+        <p:txBody>
+          <a:bodyPr wrap="square">
+            <a:spAutoFit/>
+          </a:bodyPr>
+          <a:lstStyle/>
+          <a:p>
+            <a:pPr algn="l"/>
+            <a:r>
+              <a:rPr sz="1400" b="0">
+                <a:solidFill>
+                  <a:srgbClr val="FFFFFF"/>
+                </a:solidFill>
+                <a:latin typeface="Microsoft YaHei"/>
+                <a:ea typeface="Microsoft YaHei"/>
+              </a:rPr>
+              <a:t>Tμν 本身可能是派生的。真正的源变量候选：量子态、运动学代数、关系结构——每个都有已排期的实验。</a:t>
+            </a:r>
+          </a:p>
+        </p:txBody>
+      </p:sp>
+      <p:sp>
+        <p:nvSpPr>
+          <p:cNvPr id="10" name="TextBox 9"/>
+          <p:cNvSpPr txBox="1"/>
+          <p:nvPr/>
+        </p:nvSpPr>
+        <p:spPr>
+          <a:xfrm>
+            <a:off x="1097280" y="5806440"/>
+            <a:ext cx="10058400" cy="548640"/>
+          </a:xfrm>
+          <a:prstGeom prst="rect">
+            <a:avLst/>
+          </a:prstGeom>
+          <a:noFill/>
+        </p:spPr>
+        <p:txBody>
+          <a:bodyPr wrap="square">
+            <a:spAutoFit/>
+          </a:bodyPr>
+          <a:lstStyle/>
+          <a:p>
+            <a:pPr algn="ctr"/>
+            <a:r>
+              <a:rPr sz="1500" b="1">
+                <a:solidFill>
+                  <a:srgbClr val="F5C642"/>
+                </a:solidFill>
+                <a:latin typeface="Microsoft YaHei"/>
+                <a:ea typeface="Microsoft YaHei"/>
+              </a:rPr>
+              <a:t>反重力如果存在，不会是一台抵抗引力的机器——而地图的第一步已经完成：19 行，26 份脚本，9 篇论文中英双版，全部可复现。</a:t>
+            </a:r>
+          </a:p>
+        </p:txBody>
+      </p:sp>
+      <p:sp>
+        <p:nvSpPr>
+          <p:cNvPr id="11" name="TextBox 10"/>
+          <p:cNvSpPr txBox="1"/>
+          <p:nvPr/>
+        </p:nvSpPr>
+        <p:spPr>
+          <a:xfrm>
+            <a:off x="502920" y="6446520"/>
+            <a:ext cx="9601200" cy="320040"/>
+          </a:xfrm>
+          <a:prstGeom prst="rect">
+            <a:avLst/>
+          </a:prstGeom>
+          <a:noFill/>
+        </p:spPr>
+        <p:txBody>
+          <a:bodyPr wrap="square">
+            <a:spAutoFit/>
+          </a:bodyPr>
+          <a:lstStyle/>
+          <a:p>
+            <a:pPr algn="l"/>
+            <a:r>
+              <a:rPr sz="900" b="0">
+                <a:solidFill>
+                  <a:srgbClr val="666666"/>
+                </a:solidFill>
+                <a:latin typeface="Microsoft YaHei"/>
+                <a:ea typeface="Microsoft YaHei"/>
+              </a:rPr>
+              <a:t/>
+            </a:r>
+          </a:p>
+        </p:txBody>
+      </p:sp>
+      <p:sp>
+        <p:nvSpPr>
+          <p:cNvPr id="12" name="TextBox 11"/>
+          <p:cNvSpPr txBox="1"/>
+          <p:nvPr/>
+        </p:nvSpPr>
+        <p:spPr>
+          <a:xfrm>
+            <a:off x="11247120" y="6446520"/>
+            <a:ext cx="731520" cy="320040"/>
+          </a:xfrm>
+          <a:prstGeom prst="rect">
+            <a:avLst/>
+          </a:prstGeom>
+          <a:noFill/>
+        </p:spPr>
+        <p:txBody>
+          <a:bodyPr wrap="square">
+            <a:spAutoFit/>
+          </a:bodyPr>
+          <a:lstStyle/>
+          <a:p>
+            <a:pPr algn="r"/>
+            <a:r>
+              <a:rPr sz="900" b="0">
+                <a:solidFill>
+                  <a:srgbClr val="666666"/>
+                </a:solidFill>
+                <a:latin typeface="Microsoft YaHei"/>
+                <a:ea typeface="Microsoft YaHei"/>
+              </a:rPr>
+              <a:t>17</a:t>
+            </a:r>
+          </a:p>
+        </p:txBody>
+      </p:sp>
+    </p:spTree>
+  </p:cSld>
+  <p:clrMapOvr>
+    <a:masterClrMapping/>
+  </p:clrMapOvr>
+</p:sld>
+</file>
+
+<file path=ppt/slides/slide18.xml><?xml version="1.0" encoding="utf-8"?>
+<p:sld xmlns:a="http://schemas.openxmlformats.org/drawingml/2006/main" xmlns:p="http://schemas.openxmlformats.org/presentationml/2006/main" xmlns:r="http://schemas.openxmlformats.org/officeDocument/2006/relationships">
+  <p:cSld>
+    <p:spTree>
+      <p:nvGrpSpPr>
+        <p:cNvPr id="1" name=""/>
+        <p:cNvGrpSpPr/>
+        <p:nvPr/>
+      </p:nvGrpSpPr>
+      <p:grpSpPr/>
+      <p:sp>
+        <p:nvSpPr>
+          <p:cNvPr id="2" name="TextBox 1"/>
+          <p:cNvSpPr txBox="1"/>
+          <p:nvPr/>
+        </p:nvSpPr>
+        <p:spPr>
+          <a:xfrm>
+            <a:off x="502920" y="256032"/>
+            <a:ext cx="11155680" cy="640080"/>
+          </a:xfrm>
+          <a:prstGeom prst="rect">
+            <a:avLst/>
+          </a:prstGeom>
+          <a:noFill/>
+        </p:spPr>
+        <p:txBody>
+          <a:bodyPr wrap="square">
+            <a:spAutoFit/>
+          </a:bodyPr>
+          <a:lstStyle/>
+          <a:p>
+            <a:pPr algn="l"/>
+            <a:r>
+              <a:rPr sz="2500" b="1">
+                <a:solidFill>
+                  <a:srgbClr val="C0392B"/>
+                </a:solidFill>
+                <a:latin typeface="Microsoft YaHei"/>
+                <a:ea typeface="Microsoft YaHei"/>
+              </a:rPr>
+              <a:t>参考文献与代码</a:t>
+            </a:r>
+          </a:p>
+        </p:txBody>
+      </p:sp>
+      <p:sp>
+        <p:nvSpPr>
+          <p:cNvPr id="3" name="Rectangle 2"/>
+          <p:cNvSpPr/>
+          <p:nvPr/>
+        </p:nvSpPr>
+        <p:spPr>
+          <a:xfrm>
+            <a:off x="530352" y="896112"/>
+            <a:ext cx="2194560" cy="27940"/>
+          </a:xfrm>
+          <a:prstGeom prst="rect">
+            <a:avLst/>
+          </a:prstGeom>
+          <a:solidFill>
+            <a:srgbClr val="C0392B"/>
+          </a:solidFill>
+          <a:ln>
+            <a:noFill/>
+          </a:ln>
+        </p:spPr>
+        <p:style>
+          <a:lnRef idx="1">
+            <a:schemeClr val="accent1"/>
+          </a:lnRef>
+          <a:fillRef idx="3">
+            <a:schemeClr val="accent1"/>
+          </a:fillRef>
+          <a:effectRef idx="2">
+            <a:schemeClr val="accent1"/>
+          </a:effectRef>
+          <a:fontRef idx="minor">
+            <a:schemeClr val="lt1"/>
+          </a:fontRef>
+        </p:style>
+        <p:txBody>
+          <a:bodyPr rtlCol="0" anchor="ctr"/>
+          <a:lstStyle/>
+          <a:p>
+            <a:pPr algn="ctr"/>
+          </a:p>
+        </p:txBody>
+      </p:sp>
+      <p:sp>
+        <p:nvSpPr>
+          <p:cNvPr id="4" name="TextBox 3"/>
+          <p:cNvSpPr txBox="1"/>
+          <p:nvPr/>
+        </p:nvSpPr>
+        <p:spPr>
+          <a:xfrm>
+            <a:off x="11292840" y="137160"/>
+            <a:ext cx="731520" cy="457200"/>
+          </a:xfrm>
+          <a:prstGeom prst="rect">
+            <a:avLst/>
+          </a:prstGeom>
+          <a:noFill/>
+        </p:spPr>
+        <p:txBody>
+          <a:bodyPr wrap="square">
+            <a:spAutoFit/>
+          </a:bodyPr>
+          <a:lstStyle/>
+          <a:p>
+            <a:pPr algn="r"/>
+            <a:r>
+              <a:rPr sz="1300" b="1">
+                <a:solidFill>
+                  <a:srgbClr val="666666"/>
+                </a:solidFill>
+                <a:latin typeface="Microsoft YaHei"/>
+                <a:ea typeface="Microsoft YaHei"/>
+              </a:rPr>
+              <a:t>18</a:t>
+            </a:r>
+          </a:p>
+        </p:txBody>
+      </p:sp>
+      <p:sp>
+        <p:nvSpPr>
+          <p:cNvPr id="5" name="TextBox 4"/>
+          <p:cNvSpPr txBox="1"/>
+          <p:nvPr/>
+        </p:nvSpPr>
+        <p:spPr>
+          <a:xfrm>
+            <a:off x="502920" y="1234440"/>
+            <a:ext cx="11155680" cy="4206240"/>
+          </a:xfrm>
+          <a:prstGeom prst="rect">
+            <a:avLst/>
+          </a:prstGeom>
+          <a:noFill/>
+        </p:spPr>
+        <p:txBody>
+          <a:bodyPr wrap="square">
+            <a:spAutoFit/>
+          </a:bodyPr>
+          <a:lstStyle/>
+          <a:p>
+            <a:pPr algn="l"/>
+            <a:r>
+              <a:rPr sz="1600" b="1">
+                <a:solidFill>
+                  <a:srgbClr val="1B1B2B"/>
+                </a:solidFill>
+                <a:latin typeface="Microsoft YaHei"/>
+                <a:ea typeface="Microsoft YaHei"/>
+              </a:rPr>
+              <a:t>全部可复现资产：github.com/everest-an/Antigravity</a:t>
+            </a:r>
+          </a:p>
+          <a:p>
+            <a:pPr algn="l"/>
+            <a:r>
+              <a:rPr sz="1200" b="0">
+                <a:solidFill>
+                  <a:srgbClr val="1B1B2B"/>
+                </a:solidFill>
+                <a:latin typeface="Microsoft YaHei"/>
+                <a:ea typeface="Microsoft YaHei"/>
+              </a:rPr>
+              <a:t>· 论文 9 篇中英双版（18 份 PDF）：三种统一 / 三种统一之后 / 核钟实验设计 v2.0 / 统一约束重推导 / 分类定理（含推论 4）/ 三种相同性（SHPSM 对话稿）/ GIE 逻辑重建 / 态控制零背景定理 / 三出口分流协议</a:t>
+            </a:r>
+          </a:p>
+          <a:p>
+            <a:pPr algn="l"/>
+            <a:r>
+              <a:rPr sz="1300" b="0">
+                <a:solidFill>
+                  <a:srgbClr val="1B1B2B"/>
+                </a:solidFill>
+                <a:latin typeface="Microsoft YaHei"/>
+                <a:ea typeface="Microsoft YaHei"/>
+              </a:rPr>
+              <a:t>· 核算 19 份 + 模拟 7 份（run_all.py 一键全跑，test_all.py 38 项 0 失败）</a:t>
+            </a:r>
+          </a:p>
+          <a:p>
+            <a:pPr algn="l"/>
+            <a:r>
+              <a:rPr sz="1300" b="0">
+                <a:solidFill>
+                  <a:srgbClr val="1B1B2B"/>
+                </a:solidFill>
+                <a:latin typeface="Microsoft YaHei"/>
+                <a:ea typeface="Microsoft YaHei"/>
+              </a:rPr>
+              <a:t>· 投稿图 9 幅中英双版（PNG + SVG，脚本生成，CI 自动回归）</a:t>
+            </a:r>
+          </a:p>
+          <a:p>
+            <a:pPr algn="l"/>
+            <a:r>
+              <a:rPr sz="1300" b="0">
+                <a:solidFill>
+                  <a:srgbClr val="1B1B2B"/>
+                </a:solidFill>
+                <a:latin typeface="Microsoft YaHei"/>
+                <a:ea typeface="Microsoft YaHei"/>
+              </a:rPr>
+              <a:t>· 参考文献总表 ~110 条（含预印本/同行评议状态标注）</a:t>
+            </a:r>
+          </a:p>
+          <a:p>
+            <a:pPr algn="l"/>
+            <a:r>
+              <a:rPr sz="600" b="0">
+                <a:solidFill>
+                  <a:srgbClr val="1B1B2B"/>
+                </a:solidFill>
+                <a:latin typeface="Microsoft YaHei"/>
+                <a:ea typeface="Microsoft YaHei"/>
+              </a:rPr>
+              <a:t/>
+            </a:r>
+          </a:p>
+          <a:p>
+            <a:pPr algn="l"/>
+            <a:r>
+              <a:rPr sz="1050" b="0">
+                <a:solidFill>
+                  <a:srgbClr val="666666"/>
+                </a:solidFill>
+                <a:latin typeface="Microsoft YaHei"/>
+                <a:ea typeface="Microsoft YaHei"/>
+              </a:rPr>
+              <a:t>核心文献：Bose et al. PRL 2017 · Fedida–Kent PRD 2025 · Salzger–Vilasini arXiv:2605.08351 · GQuEST PRX 2025 · Derevianko et al. Colloquium 2026 · Bobrick–Martire CQG 2021 · Barzegar et al. arXiv:2602.16495 · De Haro–Butterfield 2025 专著</a:t>
+            </a:r>
+          </a:p>
+          <a:p>
+            <a:pPr algn="l"/>
+            <a:r>
+              <a:rPr sz="600" b="0">
+                <a:solidFill>
+                  <a:srgbClr val="1B1B2B"/>
+                </a:solidFill>
+                <a:latin typeface="Microsoft YaHei"/>
+                <a:ea typeface="Microsoft YaHei"/>
+              </a:rPr>
+              <a:t/>
+            </a:r>
+          </a:p>
+          <a:p>
+            <a:pPr algn="l"/>
+            <a:r>
+              <a:rPr sz="1100" b="0">
+                <a:solidFill>
+                  <a:srgbClr val="666666"/>
+                </a:solidFill>
+                <a:latin typeface="Microsoft YaHei"/>
+                <a:ea typeface="Microsoft YaHei"/>
+              </a:rPr>
+              <a:t>致谢：本汇报按 nature-skills（Yuan1z0825）的 nature-paper2ppt 工作流生成。</a:t>
+            </a:r>
+          </a:p>
+        </p:txBody>
+      </p:sp>
+      <p:sp>
+        <p:nvSpPr>
+          <p:cNvPr id="6" name="TextBox 5"/>
+          <p:cNvSpPr txBox="1"/>
+          <p:nvPr/>
+        </p:nvSpPr>
+        <p:spPr>
+          <a:xfrm>
+            <a:off x="502920" y="6446520"/>
+            <a:ext cx="9601200" cy="320040"/>
+          </a:xfrm>
+          <a:prstGeom prst="rect">
+            <a:avLst/>
+          </a:prstGeom>
+          <a:noFill/>
+        </p:spPr>
+        <p:txBody>
+          <a:bodyPr wrap="square">
+            <a:spAutoFit/>
+          </a:bodyPr>
+          <a:lstStyle/>
+          <a:p>
+            <a:pPr algn="l"/>
+            <a:r>
+              <a:rPr sz="900" b="0">
+                <a:solidFill>
+                  <a:srgbClr val="666666"/>
+                </a:solidFill>
+                <a:latin typeface="Microsoft YaHei"/>
+                <a:ea typeface="Microsoft YaHei"/>
+              </a:rPr>
+              <a:t/>
+            </a:r>
+          </a:p>
+        </p:txBody>
+      </p:sp>
+      <p:sp>
+        <p:nvSpPr>
+          <p:cNvPr id="7" name="TextBox 6"/>
+          <p:cNvSpPr txBox="1"/>
+          <p:nvPr/>
+        </p:nvSpPr>
+        <p:spPr>
+          <a:xfrm>
+            <a:off x="11247120" y="6446520"/>
+            <a:ext cx="731520" cy="320040"/>
+          </a:xfrm>
+          <a:prstGeom prst="rect">
+            <a:avLst/>
+          </a:prstGeom>
+          <a:noFill/>
+        </p:spPr>
+        <p:txBody>
+          <a:bodyPr wrap="square">
+            <a:spAutoFit/>
+          </a:bodyPr>
+          <a:lstStyle/>
+          <a:p>
+            <a:pPr algn="r"/>
+            <a:r>
+              <a:rPr sz="900" b="0">
+                <a:solidFill>
+                  <a:srgbClr val="666666"/>
+                </a:solidFill>
+                <a:latin typeface="Microsoft YaHei"/>
+                <a:ea typeface="Microsoft YaHei"/>
+              </a:rPr>
+              <a:t>18</a:t>
             </a:r>
           </a:p>
         </p:txBody>
